--- a/it/slides/23-Architettura_dei_Calcolatori-Verm1_sul_Cartridge_Store.pptx
+++ b/it/slides/23-Architettura_dei_Calcolatori-Verm1_sul_Cartridge_Store.pptx
@@ -119,7 +119,7 @@
   <p:extLst>
     <p:ext uri="{521415D9-36F7-43E2-AB2F-B90AF26B5E84}">
       <p14:sectionLst xmlns:p14="http://schemas.microsoft.com/office/powerpoint/2010/main">
-        <p14:section name="Apertura" id="{f68796bc-d095-20e7-10cc-ef3c3d38f492}">
+        <p14:section name="Apertura" id="{7b96b7fa-2532-e3b9-9223-38b1af8559c0}">
           <p14:sldIdLst>
             <p14:sldId id="256"/>
             <p14:sldId id="257"/>
@@ -128,14 +128,14 @@
             <p14:sldId id="260"/>
           </p14:sldIdLst>
         </p14:section>
-        <p14:section name="Passo 2: un'identità" id="{05ac8a4f-1c54-7397-a61f-b71534e0e5e6}">
+        <p14:section name="Passo 2: un'identità" id="{f099b860-3651-7d90-fe0b-93739c3bddd4}">
           <p14:sldIdLst>
             <p14:sldId id="261"/>
             <p14:sldId id="262"/>
             <p14:sldId id="263"/>
           </p14:sldIdLst>
         </p14:section>
-        <p14:section name="Passo 5: la pubblicazione" id="{e3853981-8163-b5e7-ff65-1d76689f0804}">
+        <p14:section name="Passo 5: la pubblicazione" id="{53e995e4-83c8-44d3-5568-fb00a3960363}">
           <p14:sldIdLst>
             <p14:sldId id="264"/>
             <p14:sldId id="265"/>
@@ -2687,7 +2687,63 @@
       </p:sp>
       <p:sp>
         <p:nvSpPr>
-          <p:cNvPr id="13" name="Shape 11"/>
+          <p:cNvPr id="13" name="Text 11"/>
+          <p:cNvSpPr txBox="1"/>
+          <p:nvPr/>
+        </p:nvSpPr>
+        <p:spPr>
+          <a:xfrm>
+            <a:off x="4693615" y="566928"/>
+            <a:ext cx="6949440" cy="640080"/>
+          </a:xfrm>
+          <a:prstGeom prst="rect">
+            <a:avLst/>
+          </a:prstGeom>
+          <a:noFill/>
+          <a:ln/>
+        </p:spPr>
+        <p:txBody>
+          <a:bodyPr wrap="square" lIns="0" tIns="0" rIns="0" bIns="0" rtlCol="0" anchor="t"/>
+          <a:lstStyle/>
+          <a:p>
+            <a:pPr algn="r" indent="0" marL="0">
+              <a:buNone/>
+            </a:pPr>
+            <a:r>
+              <a:rPr lang="en-US" sz="1300" dirty="0">
+                <a:solidFill>
+                  <a:srgbClr val="CFE3EA"/>
+                </a:solidFill>
+                <a:latin typeface="Calibri" pitchFamily="34" charset="0"/>
+                <a:ea typeface="Calibri" pitchFamily="34" charset="-122"/>
+                <a:cs typeface="Calibri" pitchFamily="34" charset="-120"/>
+              </a:rPr>
+              <a:t>Presentazione della lezione. I listati, il programma completo e come provarlo sono nella presentazione del codice:</a:t>
+            </a:r>
+            <a:endParaRPr lang="en-US" sz="1300" dirty="0"/>
+          </a:p>
+          <a:p>
+            <a:pPr algn="r" indent="0" marL="0">
+              <a:buNone/>
+            </a:pPr>
+            <a:r>
+              <a:rPr lang="en-US" sz="1300" dirty="0">
+                <a:solidFill>
+                  <a:srgbClr val="CFE3EA"/>
+                </a:solidFill>
+                <a:latin typeface="Calibri" pitchFamily="34" charset="0"/>
+                <a:ea typeface="Calibri" pitchFamily="34" charset="-122"/>
+                <a:cs typeface="Calibri" pitchFamily="34" charset="-120"/>
+              </a:rPr>
+              <a:t>23-Architettura_dei_Calcolatori-Verm1_sul_Cartridge_Store-Codice.pptx</a:t>
+            </a:r>
+            <a:endParaRPr lang="en-US" sz="1300" dirty="0"/>
+          </a:p>
+        </p:txBody>
+      </p:sp>
+      <p:sp>
+        <p:nvSpPr>
+          <p:cNvPr id="14" name="Shape 12"/>
           <p:cNvSpPr/>
           <p:nvPr/>
         </p:nvSpPr>
@@ -2714,7 +2770,7 @@
       </p:sp>
       <p:pic>
         <p:nvPicPr>
-          <p:cNvPr id="14" name="Image 0" descr="/Users/raffaelemontella/devel/riscv-prg32/computer-architecture-with-prg32/tools/assets/prg32qt_store.png">    </p:cNvPr>
+          <p:cNvPr id="15" name="Image 0" descr="/Users/raffaelemontella/devel/riscv-prg32/computer-architecture-with-prg32/tools/assets/prg32qt_store.png">    </p:cNvPr>
           <p:cNvPicPr>
             <a:picLocks noChangeAspect="1"/>
           </p:cNvPicPr>

--- a/it/slides/23-Architettura_dei_Calcolatori-Verm1_sul_Cartridge_Store.pptx
+++ b/it/slides/23-Architettura_dei_Calcolatori-Verm1_sul_Cartridge_Store.pptx
@@ -119,7 +119,7 @@
   <p:extLst>
     <p:ext uri="{521415D9-36F7-43E2-AB2F-B90AF26B5E84}">
       <p14:sectionLst xmlns:p14="http://schemas.microsoft.com/office/powerpoint/2010/main">
-        <p14:section name="Apertura" id="{7b96b7fa-2532-e3b9-9223-38b1af8559c0}">
+        <p14:section name="Apertura" id="{b5d716fd-f7d9-e429-68c4-69636a48a79a}">
           <p14:sldIdLst>
             <p14:sldId id="256"/>
             <p14:sldId id="257"/>
@@ -128,14 +128,14 @@
             <p14:sldId id="260"/>
           </p14:sldIdLst>
         </p14:section>
-        <p14:section name="Passo 2: un'identità" id="{f099b860-3651-7d90-fe0b-93739c3bddd4}">
+        <p14:section name="Passo 2: un'identità" id="{92642b0d-26f6-821b-c88d-91b15a401f6e}">
           <p14:sldIdLst>
             <p14:sldId id="261"/>
             <p14:sldId id="262"/>
             <p14:sldId id="263"/>
           </p14:sldIdLst>
         </p14:section>
-        <p14:section name="Passo 5: la pubblicazione" id="{53e995e4-83c8-44d3-5568-fb00a3960363}">
+        <p14:section name="Passo 5: la pubblicazione" id="{570765a6-6678-bdbd-1fc9-e06050497f67}">
           <p14:sldIdLst>
             <p14:sldId id="264"/>
             <p14:sldId id="265"/>
@@ -549,6 +549,8 @@
             <a:r>
               <a:rPr lang="en-US" dirty="0"/>
               <a:t>Il progetto finisce oggi, con il passo che trasforma un programma in un prodotto. Il vostro Verm1 gira sulla vostra scrivania; alla fine di questa lezione sarà un unico file che chiunque può installare, sul kit, su QEMU o su PRG32-QT, con un nome, un'icona e la vostra firma. La citazione, dal gruppo che costruì il primo Macintosh, dice che un lavoro è finito solo quando è stato consegnato.
+Stato di apprendimento: DA COMPRENDERE OGGI, alla fine di questa lezione lo spiegate, lo seguite passo passo e lo applicate da soli; DA UTILIZZARE OGGI, oggi seguite e usate la ricetta; come funziona dentro si spiega più avanti, o non fa parte del corso; DA COMPRENDERE PIÙ AVANTI, riconoscete il nome e lo scopo; lo spiega una lezione successiva. Una slide senza etichetta è contesto: una storia, un esempio, una domanda, un esercizio.
+Stato di apprendimento di questa lezione. DA COMPRENDERE OGGI: impacchettare e pubblicare; la cartuccia portabile. DA UTILIZZARE OGGI: gli strumenti di PRG32 (si usa, non si studia, in questo corso). DA COMPRENDERE PIÙ AVANTI: niente. Una slide senza etichetta è contesto: una storia, un esempio, una domanda, un esercizio.
 Per il docente: Ultima lezione del progetto; la Lezione 24 chiude il corso con uno sguardo in avanti. Ancora un tutorial: alla fine ogni studente ha un bundle, verm1-1.0.0.zip, controllato e pronto per l'invio. Il caricamento è un atto personale con un token personale: fatelo in laboratorio solo con gli studenti che lo desiderano. Tutto, fino al caricamento escluso, viene eseguito da tools/tests/verm1_store.py sul gioco di riferimento.</a:t>
             </a:r>
             <a:endParaRPr lang="en-US" dirty="0"/>
@@ -638,6 +640,7 @@
             <a:r>
               <a:rPr lang="en-US" dirty="0"/>
               <a:t>La lista di controllo per l'invio, sette punti: giocato fino alla fine su ogni architettura; abi-table per ogni file; id unico e vostro, versione nuova, descrizioni oneste; autori, licenza e colophon completi; i metadati giusti dentro ogni cartuccia; il bundle provato su un altro calcolatore; il token in nessun file. Una lista di controllo non è burocrazia: è lo strumento con cui gli esperti evitano gli errori degli esperti.
+DA COMPRENDERE OGGI: impacchettare e pubblicare.
 Per il docente: Stampatela. Una lista di controllo non è burocrazia: è il modo in cui piloti e chirurghi evitano gli errori che commettono gli esperti.</a:t>
             </a:r>
             <a:endParaRPr lang="en-US" dirty="0"/>
@@ -907,6 +910,7 @@
             <a:r>
               <a:rPr lang="en-US" dirty="0"/>
               <a:t>Che cosa avete costruito in questo corso. Un gioco di seicento righe di assembly, cresciuto da tre funzioni che si limitavano a ritornare. Con esso, ogni livello della macchina: bit e numeri, porte e tabelle, stato e memoria, il processore, lo schermo, i dispositivi. Un metodo: un passo eseguibile alla volta, e uno sguardo dentro ogni volta che qualcosa vi sorprende. E l'ultimo passo, che ne fa ingegneria: un prodotto con un nome, una versione e un autore. La prossima lezione guarda oltre il kit.
+Stato di apprendimento, riepilogo. DA COMPRENDERE OGGI: impacchettare e pubblicare; la cartuccia portabile. DA UTILIZZARE OGGI: gli strumenti di PRG32 (si usa, non si studia, in questo corso). DA COMPRENDERE PIÙ AVANTI: niente. Una slide senza etichetta è contesto: una storia, un esempio, una domanda, un esercizio.
 Per il docente: Il progetto finisce qui; la Lezione 24 guarda oltre il kit, alle macchine che eseguono le stesse istruzioni su grande scala. I prodotti del progetto sono il sorgente della variante dello studente e il suo bundle; l'esame orale può partire da una qualunque delle sue righe.</a:t>
             </a:r>
             <a:endParaRPr lang="en-US" dirty="0"/>
@@ -1084,6 +1088,7 @@
             <a:r>
               <a:rPr lang="en-US" dirty="0"/>
               <a:t>Perché pubblicare? Un programma che gira solo sul calcolatore del suo autore è un esercizio; uno che altri possono installare è un prodotto. Pubblicare vi obbliga a rispondere a domande che un esercizio lascia saltare: come si chiama, chi l'ha fatto, su che cosa gira, che cosa possono farne gli altri. Il Cartridge Store è lo scaffale di PRG32, e ogni cartuccia che vi si trova è stata scritta da qualcuno che ha cominciato da dove avete cominciato voi.
+DA COMPRENDERE OGGI: impacchettare e pubblicare.
 Per il docente: Lo Store è su store.prg32.uniparthenope.it; il suo software è aperto, github.com/riscv-prg32/CartridgeStore. PRG32-QT ha un proprio browser dello Store. Mostrate entrambi.</a:t>
             </a:r>
             <a:endParaRPr lang="en-US" dirty="0"/>
@@ -1173,6 +1178,7 @@
             <a:r>
               <a:rPr lang="en-US" dirty="0"/>
               <a:t>Il percorso dal sorgente allo scaffale in sei tappe: il vostro file sorgente; due cartucce, una per architettura; i metadati, cioè identità, icona e crediti; il bundle; la revisione di un redattore; lo Store. I primi quattro passi di oggi avvengono interamente sul vostro calcolatore. Solo il quinto parla con lo Store: fino ad allora nulla lascia la vostra macchina.
+DA COMPRENDERE OGGI: impacchettare e pubblicare.
 Per il docente: Il percorso della lezione. Nulla lascia il calcolatore dello studente prima del comando di pubblicazione.</a:t>
             </a:r>
             <a:endParaRPr lang="en-US" dirty="0"/>
@@ -1262,6 +1268,7 @@
             <a:r>
               <a:rPr lang="en-US" dirty="0"/>
               <a:t>Prima di confezionare, chiedetevi se il gioco è finito. Sei controlli, ciascuno con un metodo e uno strumento. Parte, si gioca e finisce: giocate tre partite intere. Nessun frame è in ritardo: guardate la telemetria. La memoria è coerente: mettete in pausa a caso e confrontate anello, mappa e schermo. Gira sulla seconda architettura, QEMU, e sul kit vero se ne avete uno. Ed è vostro: ha qualcosa che il riferimento non ha. Una cartuccia mai eseguita su un target non va pubblicata per quel target.
+DA COMPRENDERE OGGI: impacchettare e pubblicare.
 Per il docente: Il debugger si usa un'ultima volta, come strumento di qualità. Una cartuccia che non è mai stata eseguita su un target non va pubblicata per quel target.</a:t>
             </a:r>
             <a:endParaRPr lang="en-US" dirty="0"/>
@@ -1351,6 +1358,7 @@
             <a:r>
               <a:rPr lang="en-US" dirty="0"/>
               <a:t>Ogni campo vi impegna a qualcosa. L'id è per consuetudine un nome di dominio rovesciato, e non cambia mai: metteteci il vostro nome, perché due studenti non possono pubblicare lo stesso. La version segue lo schema major, minor, patch, e una versione pubblicata si considera permanente: un errore si corregge con una nuova versione. Gli authors sono tutti quelli che hanno scritto il gioco. La license dice che cosa possono farne gli altri. I tags sono il modo in cui verrà trovato.
+DA COMPRENDERE OGGI: impacchettare e pubblicare.
 Per il docente: Due studenti non possono pubblicare lo stesso id: ciascuno usa un id proprio, per esempio it.uniparthenope.arc12.&lt;cognome&gt;.verm1. Concordate la convenzione in aula. Un id e una versione, una volta pubblicati, vanno considerati permanenti: un errore si corregge con una nuova versione, non con una sostituzione. È una regola di buona pratica (semantic versioning), su cui contano i giocatori che hanno già installato la 1.0.0.</a:t>
             </a:r>
             <a:endParaRPr lang="en-US" dirty="0"/>
@@ -1440,6 +1448,7 @@
             <a:r>
               <a:rPr lang="en-US" dirty="0"/>
               <a:t>L'icona è una piccola immagine PNG che rappresenta il gioco sullo scaffale. Quella di riferimento è di 64 per 64 pixel: un verme e un pezzo di cibo con i colori del gioco. La pixel art si addice a una macchina di questa risoluzione: disegnate in grande, cella per cella, con qualunque editor che salvi PNG. Salvatela come icon.png accanto al manifest. E disegnatela voi: un'immagine presa dal web è il lavoro di qualcun altro.
+DA COMPRENDERE OGGI: impacchettare e pubblicare.
 Per il docente: L'icona di riferimento è verm1/store/icon.png. Un'icona presa dal web è il lavoro di qualcun altro: disegnate la vostra.</a:t>
             </a:r>
             <a:endParaRPr lang="en-US" dirty="0"/>
@@ -1529,6 +1538,7 @@
             <a:r>
               <a:rPr lang="en-US" dirty="0"/>
               <a:t>Un omaggio non è una copia. Verm1 è un omaggio a Snake: l'idea di un verme che cresce è vecchia quanto Blockade, del 1976, e appartiene a tutti. Il nome, il codice, l'icona e i suoni sono nostri. Le regole di un gioco non sono protette; codice, immagini, musica e nomi sì. Quindi, prima di pubblicare, chiedetevi di ogni pezzo: l'ho fatto io? Se no, la sua licenza mi permette di pubblicarlo, e ho citato l'autore? Sopra c'è il vostro nome: pubblicate solo ciò che firmereste.
+DA COMPRENDERE OGGI: impacchettare e pubblicare.
 Per il docente: Le regole di un gioco non sono protette; codice, immagini, musica e nomi sì. Un'introduzione breve e concreta al diritto d'autore, che gli ingegneri incontrano presto.</a:t>
             </a:r>
             <a:endParaRPr lang="en-US" dirty="0"/>
@@ -1618,6 +1628,7 @@
             <a:r>
               <a:rPr lang="en-US" dirty="0"/>
               <a:t>Che cosa succede dopo, in quattro tappe. In attesa: il bundle è conservato come invio, e non è ancora sullo scaffale. Revisione: un redattore controlla che si installi, giri, sia descritto onestamente e non contenga nulla che non sia vostro. Pubblicato: il gioco compare nello Store per le architetture dichiarate. E se trovate un errore: correggetelo, portate la versione a 1.0.1, confezionate e inviate di nuovo; la versione 1.0.0 resta com'era.
+DA COMPRENDERE OGGI: impacchettare e pubblicare.
 Per il docente: La moderazione protegge i giocatori e gli autori. Un rifiuto arriva con una motivazione: rispondete con una nuova versione.</a:t>
             </a:r>
             <a:endParaRPr lang="en-US" dirty="0"/>
@@ -2794,6 +2805,420 @@
       </p:pic>
       <p:sp>
         <p:nvSpPr>
+          <p:cNvPr id="16" name="Shape 13"/>
+          <p:cNvSpPr/>
+          <p:nvPr/>
+        </p:nvSpPr>
+        <p:spPr>
+          <a:xfrm>
+            <a:off x="8910777" y="91440"/>
+            <a:ext cx="2732278" cy="274320"/>
+          </a:xfrm>
+          <a:prstGeom prst="rect">
+            <a:avLst/>
+          </a:prstGeom>
+          <a:solidFill>
+            <a:srgbClr val="F3E8FF"/>
+          </a:solidFill>
+          <a:ln w="12700">
+            <a:solidFill>
+              <a:srgbClr val="7E22CE"/>
+            </a:solidFill>
+            <a:prstDash val="dash"/>
+          </a:ln>
+        </p:spPr>
+      </p:sp>
+      <p:sp>
+        <p:nvSpPr>
+          <p:cNvPr id="17" name="Shape 14"/>
+          <p:cNvSpPr/>
+          <p:nvPr/>
+        </p:nvSpPr>
+        <p:spPr>
+          <a:xfrm>
+            <a:off x="8938209" y="128016"/>
+            <a:ext cx="45720" cy="45720"/>
+          </a:xfrm>
+          <a:prstGeom prst="rect">
+            <a:avLst/>
+          </a:prstGeom>
+          <a:solidFill>
+            <a:srgbClr val="7E22CE"/>
+          </a:solidFill>
+          <a:ln w="12700">
+            <a:solidFill>
+              <a:srgbClr val="7E22CE"/>
+            </a:solidFill>
+            <a:prstDash val="solid"/>
+          </a:ln>
+        </p:spPr>
+      </p:sp>
+      <p:sp>
+        <p:nvSpPr>
+          <p:cNvPr id="18" name="Shape 15"/>
+          <p:cNvSpPr/>
+          <p:nvPr/>
+        </p:nvSpPr>
+        <p:spPr>
+          <a:xfrm>
+            <a:off x="8938209" y="205740"/>
+            <a:ext cx="45720" cy="45720"/>
+          </a:xfrm>
+          <a:prstGeom prst="rect">
+            <a:avLst/>
+          </a:prstGeom>
+          <a:solidFill>
+            <a:srgbClr val="7E22CE"/>
+          </a:solidFill>
+          <a:ln w="12700">
+            <a:solidFill>
+              <a:srgbClr val="7E22CE"/>
+            </a:solidFill>
+            <a:prstDash val="solid"/>
+          </a:ln>
+        </p:spPr>
+      </p:sp>
+      <p:sp>
+        <p:nvSpPr>
+          <p:cNvPr id="19" name="Shape 16"/>
+          <p:cNvSpPr/>
+          <p:nvPr/>
+        </p:nvSpPr>
+        <p:spPr>
+          <a:xfrm>
+            <a:off x="8938209" y="283464"/>
+            <a:ext cx="45720" cy="45720"/>
+          </a:xfrm>
+          <a:prstGeom prst="rect">
+            <a:avLst/>
+          </a:prstGeom>
+          <a:solidFill>
+            <a:srgbClr val="7E22CE"/>
+          </a:solidFill>
+          <a:ln w="12700">
+            <a:solidFill>
+              <a:srgbClr val="7E22CE"/>
+            </a:solidFill>
+            <a:prstDash val="solid"/>
+          </a:ln>
+        </p:spPr>
+      </p:sp>
+      <p:pic>
+        <p:nvPicPr>
+          <p:cNvPr id="20" name="Image 1" descr="preencoded.png">    </p:cNvPr>
+          <p:cNvPicPr>
+            <a:picLocks noChangeAspect="1"/>
+          </p:cNvPicPr>
+          <p:nvPr/>
+        </p:nvPicPr>
+        <p:blipFill>
+          <a:blip r:embed="rId2"/>
+          <a:stretch>
+            <a:fillRect/>
+          </a:stretch>
+        </p:blipFill>
+        <p:spPr>
+          <a:xfrm>
+            <a:off x="9038793" y="128016"/>
+            <a:ext cx="201168" cy="201168"/>
+          </a:xfrm>
+          <a:prstGeom prst="rect">
+            <a:avLst/>
+          </a:prstGeom>
+        </p:spPr>
+      </p:pic>
+      <p:sp>
+        <p:nvSpPr>
+          <p:cNvPr id="21" name="Text 17"/>
+          <p:cNvSpPr txBox="1"/>
+          <p:nvPr/>
+        </p:nvSpPr>
+        <p:spPr>
+          <a:xfrm>
+            <a:off x="9294825" y="91440"/>
+            <a:ext cx="2311654" cy="274320"/>
+          </a:xfrm>
+          <a:prstGeom prst="rect">
+            <a:avLst/>
+          </a:prstGeom>
+          <a:noFill/>
+          <a:ln/>
+        </p:spPr>
+        <p:txBody>
+          <a:bodyPr wrap="square" lIns="0" tIns="0" rIns="0" bIns="0" rtlCol="0" anchor="ctr"/>
+          <a:lstStyle/>
+          <a:p>
+            <a:pPr indent="0" marL="0">
+              <a:buNone/>
+            </a:pPr>
+            <a:r>
+              <a:rPr lang="en-US" sz="1100" b="1" dirty="0">
+                <a:solidFill>
+                  <a:srgbClr val="6B21A8"/>
+                </a:solidFill>
+                <a:latin typeface="Calibri" pitchFamily="34" charset="0"/>
+                <a:ea typeface="Calibri" pitchFamily="34" charset="-122"/>
+                <a:cs typeface="Calibri" pitchFamily="34" charset="-120"/>
+              </a:rPr>
+              <a:t>DA COMPRENDERE PIÙ AVANTI</a:t>
+            </a:r>
+            <a:endParaRPr lang="en-US" sz="1100" dirty="0"/>
+          </a:p>
+        </p:txBody>
+      </p:sp>
+      <p:sp>
+        <p:nvSpPr>
+          <p:cNvPr id="22" name="Shape 18"/>
+          <p:cNvSpPr/>
+          <p:nvPr/>
+        </p:nvSpPr>
+        <p:spPr>
+          <a:xfrm>
+            <a:off x="6675069" y="91440"/>
+            <a:ext cx="2125980" cy="274320"/>
+          </a:xfrm>
+          <a:prstGeom prst="rect">
+            <a:avLst/>
+          </a:prstGeom>
+          <a:solidFill>
+            <a:srgbClr val="FEF3C7"/>
+          </a:solidFill>
+          <a:ln w="12700">
+            <a:solidFill>
+              <a:srgbClr val="B45309"/>
+            </a:solidFill>
+            <a:prstDash val="solid"/>
+          </a:ln>
+        </p:spPr>
+      </p:sp>
+      <p:sp>
+        <p:nvSpPr>
+          <p:cNvPr id="23" name="Shape 19"/>
+          <p:cNvSpPr/>
+          <p:nvPr/>
+        </p:nvSpPr>
+        <p:spPr>
+          <a:xfrm>
+            <a:off x="6675069" y="91440"/>
+            <a:ext cx="27432" cy="274320"/>
+          </a:xfrm>
+          <a:prstGeom prst="rect">
+            <a:avLst/>
+          </a:prstGeom>
+          <a:solidFill>
+            <a:srgbClr val="B45309"/>
+          </a:solidFill>
+          <a:ln w="12700">
+            <a:solidFill>
+              <a:srgbClr val="B45309"/>
+            </a:solidFill>
+            <a:prstDash val="solid"/>
+          </a:ln>
+        </p:spPr>
+      </p:sp>
+      <p:sp>
+        <p:nvSpPr>
+          <p:cNvPr id="24" name="Shape 20"/>
+          <p:cNvSpPr/>
+          <p:nvPr/>
+        </p:nvSpPr>
+        <p:spPr>
+          <a:xfrm>
+            <a:off x="6729933" y="91440"/>
+            <a:ext cx="27432" cy="274320"/>
+          </a:xfrm>
+          <a:prstGeom prst="rect">
+            <a:avLst/>
+          </a:prstGeom>
+          <a:solidFill>
+            <a:srgbClr val="B45309"/>
+          </a:solidFill>
+          <a:ln w="12700">
+            <a:solidFill>
+              <a:srgbClr val="B45309"/>
+            </a:solidFill>
+            <a:prstDash val="solid"/>
+          </a:ln>
+        </p:spPr>
+      </p:sp>
+      <p:pic>
+        <p:nvPicPr>
+          <p:cNvPr id="25" name="Image 2" descr="preencoded.png">    </p:cNvPr>
+          <p:cNvPicPr>
+            <a:picLocks noChangeAspect="1"/>
+          </p:cNvPicPr>
+          <p:nvPr/>
+        </p:nvPicPr>
+        <p:blipFill>
+          <a:blip r:embed="rId3"/>
+          <a:stretch>
+            <a:fillRect/>
+          </a:stretch>
+        </p:blipFill>
+        <p:spPr>
+          <a:xfrm>
+            <a:off x="6803085" y="128016"/>
+            <a:ext cx="201168" cy="201168"/>
+          </a:xfrm>
+          <a:prstGeom prst="rect">
+            <a:avLst/>
+          </a:prstGeom>
+        </p:spPr>
+      </p:pic>
+      <p:sp>
+        <p:nvSpPr>
+          <p:cNvPr id="26" name="Text 21"/>
+          <p:cNvSpPr txBox="1"/>
+          <p:nvPr/>
+        </p:nvSpPr>
+        <p:spPr>
+          <a:xfrm>
+            <a:off x="7059117" y="91440"/>
+            <a:ext cx="1705356" cy="274320"/>
+          </a:xfrm>
+          <a:prstGeom prst="rect">
+            <a:avLst/>
+          </a:prstGeom>
+          <a:noFill/>
+          <a:ln/>
+        </p:spPr>
+        <p:txBody>
+          <a:bodyPr wrap="square" lIns="0" tIns="0" rIns="0" bIns="0" rtlCol="0" anchor="ctr"/>
+          <a:lstStyle/>
+          <a:p>
+            <a:pPr indent="0" marL="0">
+              <a:buNone/>
+            </a:pPr>
+            <a:r>
+              <a:rPr lang="en-US" sz="1100" b="1" dirty="0">
+                <a:solidFill>
+                  <a:srgbClr val="92400E"/>
+                </a:solidFill>
+                <a:latin typeface="Calibri" pitchFamily="34" charset="0"/>
+                <a:ea typeface="Calibri" pitchFamily="34" charset="-122"/>
+                <a:cs typeface="Calibri" pitchFamily="34" charset="-120"/>
+              </a:rPr>
+              <a:t>DA UTILIZZARE OGGI</a:t>
+            </a:r>
+            <a:endParaRPr lang="en-US" sz="1100" dirty="0"/>
+          </a:p>
+        </p:txBody>
+      </p:sp>
+      <p:sp>
+        <p:nvSpPr>
+          <p:cNvPr id="27" name="Shape 22"/>
+          <p:cNvSpPr/>
+          <p:nvPr/>
+        </p:nvSpPr>
+        <p:spPr>
+          <a:xfrm>
+            <a:off x="4352747" y="91440"/>
+            <a:ext cx="2212594" cy="274320"/>
+          </a:xfrm>
+          <a:prstGeom prst="rect">
+            <a:avLst/>
+          </a:prstGeom>
+          <a:solidFill>
+            <a:srgbClr val="E0F2FE"/>
+          </a:solidFill>
+          <a:ln w="12700">
+            <a:solidFill>
+              <a:srgbClr val="0369A1"/>
+            </a:solidFill>
+            <a:prstDash val="solid"/>
+          </a:ln>
+        </p:spPr>
+      </p:sp>
+      <p:sp>
+        <p:nvSpPr>
+          <p:cNvPr id="28" name="Shape 23"/>
+          <p:cNvSpPr/>
+          <p:nvPr/>
+        </p:nvSpPr>
+        <p:spPr>
+          <a:xfrm>
+            <a:off x="4352747" y="91440"/>
+            <a:ext cx="73152" cy="274320"/>
+          </a:xfrm>
+          <a:prstGeom prst="rect">
+            <a:avLst/>
+          </a:prstGeom>
+          <a:solidFill>
+            <a:srgbClr val="0369A1"/>
+          </a:solidFill>
+          <a:ln w="12700">
+            <a:solidFill>
+              <a:srgbClr val="0369A1"/>
+            </a:solidFill>
+            <a:prstDash val="solid"/>
+          </a:ln>
+        </p:spPr>
+      </p:sp>
+      <p:pic>
+        <p:nvPicPr>
+          <p:cNvPr id="29" name="Image 3" descr="preencoded.png">    </p:cNvPr>
+          <p:cNvPicPr>
+            <a:picLocks noChangeAspect="1"/>
+          </p:cNvPicPr>
+          <p:nvPr/>
+        </p:nvPicPr>
+        <p:blipFill>
+          <a:blip r:embed="rId4"/>
+          <a:stretch>
+            <a:fillRect/>
+          </a:stretch>
+        </p:blipFill>
+        <p:spPr>
+          <a:xfrm>
+            <a:off x="4480763" y="128016"/>
+            <a:ext cx="201168" cy="201168"/>
+          </a:xfrm>
+          <a:prstGeom prst="rect">
+            <a:avLst/>
+          </a:prstGeom>
+        </p:spPr>
+      </p:pic>
+      <p:sp>
+        <p:nvSpPr>
+          <p:cNvPr id="30" name="Text 24"/>
+          <p:cNvSpPr txBox="1"/>
+          <p:nvPr/>
+        </p:nvSpPr>
+        <p:spPr>
+          <a:xfrm>
+            <a:off x="4736795" y="91440"/>
+            <a:ext cx="1791970" cy="274320"/>
+          </a:xfrm>
+          <a:prstGeom prst="rect">
+            <a:avLst/>
+          </a:prstGeom>
+          <a:noFill/>
+          <a:ln/>
+        </p:spPr>
+        <p:txBody>
+          <a:bodyPr wrap="square" lIns="0" tIns="0" rIns="0" bIns="0" rtlCol="0" anchor="ctr"/>
+          <a:lstStyle/>
+          <a:p>
+            <a:pPr indent="0" marL="0">
+              <a:buNone/>
+            </a:pPr>
+            <a:r>
+              <a:rPr lang="en-US" sz="1100" b="1" dirty="0">
+                <a:solidFill>
+                  <a:srgbClr val="075985"/>
+                </a:solidFill>
+                <a:latin typeface="Calibri" pitchFamily="34" charset="0"/>
+                <a:ea typeface="Calibri" pitchFamily="34" charset="-122"/>
+                <a:cs typeface="Calibri" pitchFamily="34" charset="-120"/>
+              </a:rPr>
+              <a:t>DA COMPRENDERE OGGI</a:t>
+            </a:r>
+            <a:endParaRPr lang="en-US" sz="1100" dirty="0"/>
+          </a:p>
+        </p:txBody>
+      </p:sp>
+      <p:sp>
+        <p:nvSpPr>
           <p:cNvPr id="25" name="Slide Number Placeholder 0"/>
           <p:cNvSpPr>
             <a:spLocks noGrp="1"/>
@@ -4031,6 +4456,133 @@
       </p:graphicFrame>
       <p:sp>
         <p:nvSpPr>
+          <p:cNvPr id="4" name="Shape 1"/>
+          <p:cNvSpPr/>
+          <p:nvPr/>
+        </p:nvSpPr>
+        <p:spPr>
+          <a:xfrm>
+            <a:off x="7526350" y="91440"/>
+            <a:ext cx="4116705" cy="274320"/>
+          </a:xfrm>
+          <a:prstGeom prst="rect">
+            <a:avLst/>
+          </a:prstGeom>
+          <a:solidFill>
+            <a:srgbClr val="E0F2FE"/>
+          </a:solidFill>
+          <a:ln w="12700">
+            <a:solidFill>
+              <a:srgbClr val="0369A1"/>
+            </a:solidFill>
+            <a:prstDash val="solid"/>
+          </a:ln>
+        </p:spPr>
+      </p:sp>
+      <p:sp>
+        <p:nvSpPr>
+          <p:cNvPr id="5" name="Shape 2"/>
+          <p:cNvSpPr/>
+          <p:nvPr/>
+        </p:nvSpPr>
+        <p:spPr>
+          <a:xfrm>
+            <a:off x="7526350" y="91440"/>
+            <a:ext cx="73152" cy="274320"/>
+          </a:xfrm>
+          <a:prstGeom prst="rect">
+            <a:avLst/>
+          </a:prstGeom>
+          <a:solidFill>
+            <a:srgbClr val="0369A1"/>
+          </a:solidFill>
+          <a:ln w="12700">
+            <a:solidFill>
+              <a:srgbClr val="0369A1"/>
+            </a:solidFill>
+            <a:prstDash val="solid"/>
+          </a:ln>
+        </p:spPr>
+      </p:sp>
+      <p:pic>
+        <p:nvPicPr>
+          <p:cNvPr id="6" name="Image 0" descr="preencoded.png">    </p:cNvPr>
+          <p:cNvPicPr>
+            <a:picLocks noChangeAspect="1"/>
+          </p:cNvPicPr>
+          <p:nvPr/>
+        </p:nvPicPr>
+        <p:blipFill>
+          <a:blip r:embed="rId1"/>
+          <a:stretch>
+            <a:fillRect/>
+          </a:stretch>
+        </p:blipFill>
+        <p:spPr>
+          <a:xfrm>
+            <a:off x="7654366" y="128016"/>
+            <a:ext cx="201168" cy="201168"/>
+          </a:xfrm>
+          <a:prstGeom prst="rect">
+            <a:avLst/>
+          </a:prstGeom>
+        </p:spPr>
+      </p:pic>
+      <p:sp>
+        <p:nvSpPr>
+          <p:cNvPr id="7" name="Text 3"/>
+          <p:cNvSpPr txBox="1"/>
+          <p:nvPr/>
+        </p:nvSpPr>
+        <p:spPr>
+          <a:xfrm>
+            <a:off x="7910398" y="91440"/>
+            <a:ext cx="3696081" cy="274320"/>
+          </a:xfrm>
+          <a:prstGeom prst="rect">
+            <a:avLst/>
+          </a:prstGeom>
+          <a:noFill/>
+          <a:ln/>
+        </p:spPr>
+        <p:txBody>
+          <a:bodyPr wrap="square" lIns="0" tIns="0" rIns="0" bIns="0" rtlCol="0" anchor="ctr"/>
+          <a:lstStyle/>
+          <a:p>
+            <a:pPr indent="0" marL="0">
+              <a:buNone/>
+            </a:pPr>
+            <a:r>
+              <a:rPr lang="en-US" sz="1100" b="1" dirty="0">
+                <a:solidFill>
+                  <a:srgbClr val="075985"/>
+                </a:solidFill>
+                <a:latin typeface="Calibri" pitchFamily="34" charset="0"/>
+                <a:ea typeface="Calibri" pitchFamily="34" charset="-122"/>
+                <a:cs typeface="Calibri" pitchFamily="34" charset="-120"/>
+              </a:rPr>
+              <a:t>DA COMPRENDERE OGGI</a:t>
+            </a:r>
+            <a:pPr indent="0" marL="0">
+              <a:buNone/>
+            </a:pPr>
+            <a:r>
+              <a:rPr lang="en-US" sz="1100" dirty="0">
+                <a:solidFill>
+                  <a:srgbClr val="075985"/>
+                </a:solidFill>
+                <a:latin typeface="Calibri" pitchFamily="34" charset="0"/>
+                <a:ea typeface="Calibri" pitchFamily="34" charset="-122"/>
+                <a:cs typeface="Calibri" pitchFamily="34" charset="-120"/>
+              </a:rPr>
+              <a:t> · impacchettare e pubblicare</a:t>
+            </a:r>
+            <a:endParaRPr lang="en-US" sz="1100" dirty="0"/>
+          </a:p>
+        </p:txBody>
+      </p:sp>
+      <p:sp>
+        <p:nvSpPr>
           <p:cNvPr id="25" name="Slide Number Placeholder 0"/>
           <p:cNvSpPr>
             <a:spLocks noGrp="1"/>
@@ -7346,6 +7898,133 @@
       </p:sp>
       <p:sp>
         <p:nvSpPr>
+          <p:cNvPr id="15" name="Shape 12"/>
+          <p:cNvSpPr/>
+          <p:nvPr/>
+        </p:nvSpPr>
+        <p:spPr>
+          <a:xfrm>
+            <a:off x="7526350" y="91440"/>
+            <a:ext cx="4116705" cy="274320"/>
+          </a:xfrm>
+          <a:prstGeom prst="rect">
+            <a:avLst/>
+          </a:prstGeom>
+          <a:solidFill>
+            <a:srgbClr val="E0F2FE"/>
+          </a:solidFill>
+          <a:ln w="12700">
+            <a:solidFill>
+              <a:srgbClr val="0369A1"/>
+            </a:solidFill>
+            <a:prstDash val="solid"/>
+          </a:ln>
+        </p:spPr>
+      </p:sp>
+      <p:sp>
+        <p:nvSpPr>
+          <p:cNvPr id="16" name="Shape 13"/>
+          <p:cNvSpPr/>
+          <p:nvPr/>
+        </p:nvSpPr>
+        <p:spPr>
+          <a:xfrm>
+            <a:off x="7526350" y="91440"/>
+            <a:ext cx="73152" cy="274320"/>
+          </a:xfrm>
+          <a:prstGeom prst="rect">
+            <a:avLst/>
+          </a:prstGeom>
+          <a:solidFill>
+            <a:srgbClr val="0369A1"/>
+          </a:solidFill>
+          <a:ln w="12700">
+            <a:solidFill>
+              <a:srgbClr val="0369A1"/>
+            </a:solidFill>
+            <a:prstDash val="solid"/>
+          </a:ln>
+        </p:spPr>
+      </p:sp>
+      <p:pic>
+        <p:nvPicPr>
+          <p:cNvPr id="17" name="Image 1" descr="preencoded.png">    </p:cNvPr>
+          <p:cNvPicPr>
+            <a:picLocks noChangeAspect="1"/>
+          </p:cNvPicPr>
+          <p:nvPr/>
+        </p:nvPicPr>
+        <p:blipFill>
+          <a:blip r:embed="rId2"/>
+          <a:stretch>
+            <a:fillRect/>
+          </a:stretch>
+        </p:blipFill>
+        <p:spPr>
+          <a:xfrm>
+            <a:off x="7654366" y="128016"/>
+            <a:ext cx="201168" cy="201168"/>
+          </a:xfrm>
+          <a:prstGeom prst="rect">
+            <a:avLst/>
+          </a:prstGeom>
+        </p:spPr>
+      </p:pic>
+      <p:sp>
+        <p:nvSpPr>
+          <p:cNvPr id="18" name="Text 14"/>
+          <p:cNvSpPr txBox="1"/>
+          <p:nvPr/>
+        </p:nvSpPr>
+        <p:spPr>
+          <a:xfrm>
+            <a:off x="7910398" y="91440"/>
+            <a:ext cx="3696081" cy="274320"/>
+          </a:xfrm>
+          <a:prstGeom prst="rect">
+            <a:avLst/>
+          </a:prstGeom>
+          <a:noFill/>
+          <a:ln/>
+        </p:spPr>
+        <p:txBody>
+          <a:bodyPr wrap="square" lIns="0" tIns="0" rIns="0" bIns="0" rtlCol="0" anchor="ctr"/>
+          <a:lstStyle/>
+          <a:p>
+            <a:pPr indent="0" marL="0">
+              <a:buNone/>
+            </a:pPr>
+            <a:r>
+              <a:rPr lang="en-US" sz="1100" b="1" dirty="0">
+                <a:solidFill>
+                  <a:srgbClr val="075985"/>
+                </a:solidFill>
+                <a:latin typeface="Calibri" pitchFamily="34" charset="0"/>
+                <a:ea typeface="Calibri" pitchFamily="34" charset="-122"/>
+                <a:cs typeface="Calibri" pitchFamily="34" charset="-120"/>
+              </a:rPr>
+              <a:t>DA COMPRENDERE OGGI</a:t>
+            </a:r>
+            <a:pPr indent="0" marL="0">
+              <a:buNone/>
+            </a:pPr>
+            <a:r>
+              <a:rPr lang="en-US" sz="1100" dirty="0">
+                <a:solidFill>
+                  <a:srgbClr val="075985"/>
+                </a:solidFill>
+                <a:latin typeface="Calibri" pitchFamily="34" charset="0"/>
+                <a:ea typeface="Calibri" pitchFamily="34" charset="-122"/>
+                <a:cs typeface="Calibri" pitchFamily="34" charset="-120"/>
+              </a:rPr>
+              <a:t> · impacchettare e pubblicare</a:t>
+            </a:r>
+            <a:endParaRPr lang="en-US" sz="1100" dirty="0"/>
+          </a:p>
+        </p:txBody>
+      </p:sp>
+      <p:sp>
+        <p:nvSpPr>
           <p:cNvPr id="25" name="Slide Number Placeholder 0"/>
           <p:cNvSpPr>
             <a:spLocks noGrp="1"/>
@@ -8324,6 +9003,133 @@
               <a:t>I passi da 1 a 4 di oggi avvengono sul vostro calcolatore. Solo il passo 5 parla con lo Store.</a:t>
             </a:r>
             <a:endParaRPr lang="en-US" sz="2000" dirty="0"/>
+          </a:p>
+        </p:txBody>
+      </p:sp>
+      <p:sp>
+        <p:nvSpPr>
+          <p:cNvPr id="28" name="Shape 26"/>
+          <p:cNvSpPr/>
+          <p:nvPr/>
+        </p:nvSpPr>
+        <p:spPr>
+          <a:xfrm>
+            <a:off x="7526350" y="91440"/>
+            <a:ext cx="4116705" cy="274320"/>
+          </a:xfrm>
+          <a:prstGeom prst="rect">
+            <a:avLst/>
+          </a:prstGeom>
+          <a:solidFill>
+            <a:srgbClr val="E0F2FE"/>
+          </a:solidFill>
+          <a:ln w="12700">
+            <a:solidFill>
+              <a:srgbClr val="0369A1"/>
+            </a:solidFill>
+            <a:prstDash val="solid"/>
+          </a:ln>
+        </p:spPr>
+      </p:sp>
+      <p:sp>
+        <p:nvSpPr>
+          <p:cNvPr id="29" name="Shape 27"/>
+          <p:cNvSpPr/>
+          <p:nvPr/>
+        </p:nvSpPr>
+        <p:spPr>
+          <a:xfrm>
+            <a:off x="7526350" y="91440"/>
+            <a:ext cx="73152" cy="274320"/>
+          </a:xfrm>
+          <a:prstGeom prst="rect">
+            <a:avLst/>
+          </a:prstGeom>
+          <a:solidFill>
+            <a:srgbClr val="0369A1"/>
+          </a:solidFill>
+          <a:ln w="12700">
+            <a:solidFill>
+              <a:srgbClr val="0369A1"/>
+            </a:solidFill>
+            <a:prstDash val="solid"/>
+          </a:ln>
+        </p:spPr>
+      </p:sp>
+      <p:pic>
+        <p:nvPicPr>
+          <p:cNvPr id="30" name="Image 0" descr="preencoded.png">    </p:cNvPr>
+          <p:cNvPicPr>
+            <a:picLocks noChangeAspect="1"/>
+          </p:cNvPicPr>
+          <p:nvPr/>
+        </p:nvPicPr>
+        <p:blipFill>
+          <a:blip r:embed="rId1"/>
+          <a:stretch>
+            <a:fillRect/>
+          </a:stretch>
+        </p:blipFill>
+        <p:spPr>
+          <a:xfrm>
+            <a:off x="7654366" y="128016"/>
+            <a:ext cx="201168" cy="201168"/>
+          </a:xfrm>
+          <a:prstGeom prst="rect">
+            <a:avLst/>
+          </a:prstGeom>
+        </p:spPr>
+      </p:pic>
+      <p:sp>
+        <p:nvSpPr>
+          <p:cNvPr id="31" name="Text 28"/>
+          <p:cNvSpPr txBox="1"/>
+          <p:nvPr/>
+        </p:nvSpPr>
+        <p:spPr>
+          <a:xfrm>
+            <a:off x="7910398" y="91440"/>
+            <a:ext cx="3696081" cy="274320"/>
+          </a:xfrm>
+          <a:prstGeom prst="rect">
+            <a:avLst/>
+          </a:prstGeom>
+          <a:noFill/>
+          <a:ln/>
+        </p:spPr>
+        <p:txBody>
+          <a:bodyPr wrap="square" lIns="0" tIns="0" rIns="0" bIns="0" rtlCol="0" anchor="ctr"/>
+          <a:lstStyle/>
+          <a:p>
+            <a:pPr indent="0" marL="0">
+              <a:buNone/>
+            </a:pPr>
+            <a:r>
+              <a:rPr lang="en-US" sz="1100" b="1" dirty="0">
+                <a:solidFill>
+                  <a:srgbClr val="075985"/>
+                </a:solidFill>
+                <a:latin typeface="Calibri" pitchFamily="34" charset="0"/>
+                <a:ea typeface="Calibri" pitchFamily="34" charset="-122"/>
+                <a:cs typeface="Calibri" pitchFamily="34" charset="-120"/>
+              </a:rPr>
+              <a:t>DA COMPRENDERE OGGI</a:t>
+            </a:r>
+            <a:pPr indent="0" marL="0">
+              <a:buNone/>
+            </a:pPr>
+            <a:r>
+              <a:rPr lang="en-US" sz="1100" dirty="0">
+                <a:solidFill>
+                  <a:srgbClr val="075985"/>
+                </a:solidFill>
+                <a:latin typeface="Calibri" pitchFamily="34" charset="0"/>
+                <a:ea typeface="Calibri" pitchFamily="34" charset="-122"/>
+                <a:cs typeface="Calibri" pitchFamily="34" charset="-120"/>
+              </a:rPr>
+              <a:t> · impacchettare e pubblicare</a:t>
+            </a:r>
+            <a:endParaRPr lang="en-US" sz="1100" dirty="0"/>
           </a:p>
         </p:txBody>
       </p:sp>
@@ -9916,6 +10722,133 @@
       </p:graphicFrame>
       <p:sp>
         <p:nvSpPr>
+          <p:cNvPr id="4" name="Shape 1"/>
+          <p:cNvSpPr/>
+          <p:nvPr/>
+        </p:nvSpPr>
+        <p:spPr>
+          <a:xfrm>
+            <a:off x="7526350" y="91440"/>
+            <a:ext cx="4116705" cy="274320"/>
+          </a:xfrm>
+          <a:prstGeom prst="rect">
+            <a:avLst/>
+          </a:prstGeom>
+          <a:solidFill>
+            <a:srgbClr val="E0F2FE"/>
+          </a:solidFill>
+          <a:ln w="12700">
+            <a:solidFill>
+              <a:srgbClr val="0369A1"/>
+            </a:solidFill>
+            <a:prstDash val="solid"/>
+          </a:ln>
+        </p:spPr>
+      </p:sp>
+      <p:sp>
+        <p:nvSpPr>
+          <p:cNvPr id="5" name="Shape 2"/>
+          <p:cNvSpPr/>
+          <p:nvPr/>
+        </p:nvSpPr>
+        <p:spPr>
+          <a:xfrm>
+            <a:off x="7526350" y="91440"/>
+            <a:ext cx="73152" cy="274320"/>
+          </a:xfrm>
+          <a:prstGeom prst="rect">
+            <a:avLst/>
+          </a:prstGeom>
+          <a:solidFill>
+            <a:srgbClr val="0369A1"/>
+          </a:solidFill>
+          <a:ln w="12700">
+            <a:solidFill>
+              <a:srgbClr val="0369A1"/>
+            </a:solidFill>
+            <a:prstDash val="solid"/>
+          </a:ln>
+        </p:spPr>
+      </p:sp>
+      <p:pic>
+        <p:nvPicPr>
+          <p:cNvPr id="6" name="Image 0" descr="preencoded.png">    </p:cNvPr>
+          <p:cNvPicPr>
+            <a:picLocks noChangeAspect="1"/>
+          </p:cNvPicPr>
+          <p:nvPr/>
+        </p:nvPicPr>
+        <p:blipFill>
+          <a:blip r:embed="rId1"/>
+          <a:stretch>
+            <a:fillRect/>
+          </a:stretch>
+        </p:blipFill>
+        <p:spPr>
+          <a:xfrm>
+            <a:off x="7654366" y="128016"/>
+            <a:ext cx="201168" cy="201168"/>
+          </a:xfrm>
+          <a:prstGeom prst="rect">
+            <a:avLst/>
+          </a:prstGeom>
+        </p:spPr>
+      </p:pic>
+      <p:sp>
+        <p:nvSpPr>
+          <p:cNvPr id="7" name="Text 3"/>
+          <p:cNvSpPr txBox="1"/>
+          <p:nvPr/>
+        </p:nvSpPr>
+        <p:spPr>
+          <a:xfrm>
+            <a:off x="7910398" y="91440"/>
+            <a:ext cx="3696081" cy="274320"/>
+          </a:xfrm>
+          <a:prstGeom prst="rect">
+            <a:avLst/>
+          </a:prstGeom>
+          <a:noFill/>
+          <a:ln/>
+        </p:spPr>
+        <p:txBody>
+          <a:bodyPr wrap="square" lIns="0" tIns="0" rIns="0" bIns="0" rtlCol="0" anchor="ctr"/>
+          <a:lstStyle/>
+          <a:p>
+            <a:pPr indent="0" marL="0">
+              <a:buNone/>
+            </a:pPr>
+            <a:r>
+              <a:rPr lang="en-US" sz="1100" b="1" dirty="0">
+                <a:solidFill>
+                  <a:srgbClr val="075985"/>
+                </a:solidFill>
+                <a:latin typeface="Calibri" pitchFamily="34" charset="0"/>
+                <a:ea typeface="Calibri" pitchFamily="34" charset="-122"/>
+                <a:cs typeface="Calibri" pitchFamily="34" charset="-120"/>
+              </a:rPr>
+              <a:t>DA COMPRENDERE OGGI</a:t>
+            </a:r>
+            <a:pPr indent="0" marL="0">
+              <a:buNone/>
+            </a:pPr>
+            <a:r>
+              <a:rPr lang="en-US" sz="1100" dirty="0">
+                <a:solidFill>
+                  <a:srgbClr val="075985"/>
+                </a:solidFill>
+                <a:latin typeface="Calibri" pitchFamily="34" charset="0"/>
+                <a:ea typeface="Calibri" pitchFamily="34" charset="-122"/>
+                <a:cs typeface="Calibri" pitchFamily="34" charset="-120"/>
+              </a:rPr>
+              <a:t> · impacchettare e pubblicare</a:t>
+            </a:r>
+            <a:endParaRPr lang="en-US" sz="1100" dirty="0"/>
+          </a:p>
+        </p:txBody>
+      </p:sp>
+      <p:sp>
+        <p:nvSpPr>
           <p:cNvPr id="25" name="Slide Number Placeholder 0"/>
           <p:cNvSpPr>
             <a:spLocks noGrp="1"/>
@@ -11503,6 +12436,133 @@
       </p:graphicFrame>
       <p:sp>
         <p:nvSpPr>
+          <p:cNvPr id="4" name="Shape 1"/>
+          <p:cNvSpPr/>
+          <p:nvPr/>
+        </p:nvSpPr>
+        <p:spPr>
+          <a:xfrm>
+            <a:off x="7526350" y="91440"/>
+            <a:ext cx="4116705" cy="274320"/>
+          </a:xfrm>
+          <a:prstGeom prst="rect">
+            <a:avLst/>
+          </a:prstGeom>
+          <a:solidFill>
+            <a:srgbClr val="E0F2FE"/>
+          </a:solidFill>
+          <a:ln w="12700">
+            <a:solidFill>
+              <a:srgbClr val="0369A1"/>
+            </a:solidFill>
+            <a:prstDash val="solid"/>
+          </a:ln>
+        </p:spPr>
+      </p:sp>
+      <p:sp>
+        <p:nvSpPr>
+          <p:cNvPr id="5" name="Shape 2"/>
+          <p:cNvSpPr/>
+          <p:nvPr/>
+        </p:nvSpPr>
+        <p:spPr>
+          <a:xfrm>
+            <a:off x="7526350" y="91440"/>
+            <a:ext cx="73152" cy="274320"/>
+          </a:xfrm>
+          <a:prstGeom prst="rect">
+            <a:avLst/>
+          </a:prstGeom>
+          <a:solidFill>
+            <a:srgbClr val="0369A1"/>
+          </a:solidFill>
+          <a:ln w="12700">
+            <a:solidFill>
+              <a:srgbClr val="0369A1"/>
+            </a:solidFill>
+            <a:prstDash val="solid"/>
+          </a:ln>
+        </p:spPr>
+      </p:sp>
+      <p:pic>
+        <p:nvPicPr>
+          <p:cNvPr id="6" name="Image 0" descr="preencoded.png">    </p:cNvPr>
+          <p:cNvPicPr>
+            <a:picLocks noChangeAspect="1"/>
+          </p:cNvPicPr>
+          <p:nvPr/>
+        </p:nvPicPr>
+        <p:blipFill>
+          <a:blip r:embed="rId1"/>
+          <a:stretch>
+            <a:fillRect/>
+          </a:stretch>
+        </p:blipFill>
+        <p:spPr>
+          <a:xfrm>
+            <a:off x="7654366" y="128016"/>
+            <a:ext cx="201168" cy="201168"/>
+          </a:xfrm>
+          <a:prstGeom prst="rect">
+            <a:avLst/>
+          </a:prstGeom>
+        </p:spPr>
+      </p:pic>
+      <p:sp>
+        <p:nvSpPr>
+          <p:cNvPr id="7" name="Text 3"/>
+          <p:cNvSpPr txBox="1"/>
+          <p:nvPr/>
+        </p:nvSpPr>
+        <p:spPr>
+          <a:xfrm>
+            <a:off x="7910398" y="91440"/>
+            <a:ext cx="3696081" cy="274320"/>
+          </a:xfrm>
+          <a:prstGeom prst="rect">
+            <a:avLst/>
+          </a:prstGeom>
+          <a:noFill/>
+          <a:ln/>
+        </p:spPr>
+        <p:txBody>
+          <a:bodyPr wrap="square" lIns="0" tIns="0" rIns="0" bIns="0" rtlCol="0" anchor="ctr"/>
+          <a:lstStyle/>
+          <a:p>
+            <a:pPr indent="0" marL="0">
+              <a:buNone/>
+            </a:pPr>
+            <a:r>
+              <a:rPr lang="en-US" sz="1100" b="1" dirty="0">
+                <a:solidFill>
+                  <a:srgbClr val="075985"/>
+                </a:solidFill>
+                <a:latin typeface="Calibri" pitchFamily="34" charset="0"/>
+                <a:ea typeface="Calibri" pitchFamily="34" charset="-122"/>
+                <a:cs typeface="Calibri" pitchFamily="34" charset="-120"/>
+              </a:rPr>
+              <a:t>DA COMPRENDERE OGGI</a:t>
+            </a:r>
+            <a:pPr indent="0" marL="0">
+              <a:buNone/>
+            </a:pPr>
+            <a:r>
+              <a:rPr lang="en-US" sz="1100" dirty="0">
+                <a:solidFill>
+                  <a:srgbClr val="075985"/>
+                </a:solidFill>
+                <a:latin typeface="Calibri" pitchFamily="34" charset="0"/>
+                <a:ea typeface="Calibri" pitchFamily="34" charset="-122"/>
+                <a:cs typeface="Calibri" pitchFamily="34" charset="-120"/>
+              </a:rPr>
+              <a:t> · impacchettare e pubblicare</a:t>
+            </a:r>
+            <a:endParaRPr lang="en-US" sz="1100" dirty="0"/>
+          </a:p>
+        </p:txBody>
+      </p:sp>
+      <p:sp>
+        <p:nvSpPr>
           <p:cNvPr id="25" name="Slide Number Placeholder 0"/>
           <p:cNvSpPr>
             <a:spLocks noGrp="1"/>
@@ -12015,6 +13075,133 @@
       </p:sp>
       <p:sp>
         <p:nvSpPr>
+          <p:cNvPr id="15" name="Shape 12"/>
+          <p:cNvSpPr/>
+          <p:nvPr/>
+        </p:nvSpPr>
+        <p:spPr>
+          <a:xfrm>
+            <a:off x="7526350" y="91440"/>
+            <a:ext cx="4116705" cy="274320"/>
+          </a:xfrm>
+          <a:prstGeom prst="rect">
+            <a:avLst/>
+          </a:prstGeom>
+          <a:solidFill>
+            <a:srgbClr val="E0F2FE"/>
+          </a:solidFill>
+          <a:ln w="12700">
+            <a:solidFill>
+              <a:srgbClr val="0369A1"/>
+            </a:solidFill>
+            <a:prstDash val="solid"/>
+          </a:ln>
+        </p:spPr>
+      </p:sp>
+      <p:sp>
+        <p:nvSpPr>
+          <p:cNvPr id="16" name="Shape 13"/>
+          <p:cNvSpPr/>
+          <p:nvPr/>
+        </p:nvSpPr>
+        <p:spPr>
+          <a:xfrm>
+            <a:off x="7526350" y="91440"/>
+            <a:ext cx="73152" cy="274320"/>
+          </a:xfrm>
+          <a:prstGeom prst="rect">
+            <a:avLst/>
+          </a:prstGeom>
+          <a:solidFill>
+            <a:srgbClr val="0369A1"/>
+          </a:solidFill>
+          <a:ln w="12700">
+            <a:solidFill>
+              <a:srgbClr val="0369A1"/>
+            </a:solidFill>
+            <a:prstDash val="solid"/>
+          </a:ln>
+        </p:spPr>
+      </p:sp>
+      <p:pic>
+        <p:nvPicPr>
+          <p:cNvPr id="17" name="Image 1" descr="preencoded.png">    </p:cNvPr>
+          <p:cNvPicPr>
+            <a:picLocks noChangeAspect="1"/>
+          </p:cNvPicPr>
+          <p:nvPr/>
+        </p:nvPicPr>
+        <p:blipFill>
+          <a:blip r:embed="rId2"/>
+          <a:stretch>
+            <a:fillRect/>
+          </a:stretch>
+        </p:blipFill>
+        <p:spPr>
+          <a:xfrm>
+            <a:off x="7654366" y="128016"/>
+            <a:ext cx="201168" cy="201168"/>
+          </a:xfrm>
+          <a:prstGeom prst="rect">
+            <a:avLst/>
+          </a:prstGeom>
+        </p:spPr>
+      </p:pic>
+      <p:sp>
+        <p:nvSpPr>
+          <p:cNvPr id="18" name="Text 14"/>
+          <p:cNvSpPr txBox="1"/>
+          <p:nvPr/>
+        </p:nvSpPr>
+        <p:spPr>
+          <a:xfrm>
+            <a:off x="7910398" y="91440"/>
+            <a:ext cx="3696081" cy="274320"/>
+          </a:xfrm>
+          <a:prstGeom prst="rect">
+            <a:avLst/>
+          </a:prstGeom>
+          <a:noFill/>
+          <a:ln/>
+        </p:spPr>
+        <p:txBody>
+          <a:bodyPr wrap="square" lIns="0" tIns="0" rIns="0" bIns="0" rtlCol="0" anchor="ctr"/>
+          <a:lstStyle/>
+          <a:p>
+            <a:pPr indent="0" marL="0">
+              <a:buNone/>
+            </a:pPr>
+            <a:r>
+              <a:rPr lang="en-US" sz="1100" b="1" dirty="0">
+                <a:solidFill>
+                  <a:srgbClr val="075985"/>
+                </a:solidFill>
+                <a:latin typeface="Calibri" pitchFamily="34" charset="0"/>
+                <a:ea typeface="Calibri" pitchFamily="34" charset="-122"/>
+                <a:cs typeface="Calibri" pitchFamily="34" charset="-120"/>
+              </a:rPr>
+              <a:t>DA COMPRENDERE OGGI</a:t>
+            </a:r>
+            <a:pPr indent="0" marL="0">
+              <a:buNone/>
+            </a:pPr>
+            <a:r>
+              <a:rPr lang="en-US" sz="1100" dirty="0">
+                <a:solidFill>
+                  <a:srgbClr val="075985"/>
+                </a:solidFill>
+                <a:latin typeface="Calibri" pitchFamily="34" charset="0"/>
+                <a:ea typeface="Calibri" pitchFamily="34" charset="-122"/>
+                <a:cs typeface="Calibri" pitchFamily="34" charset="-120"/>
+              </a:rPr>
+              <a:t> · impacchettare e pubblicare</a:t>
+            </a:r>
+            <a:endParaRPr lang="en-US" sz="1100" dirty="0"/>
+          </a:p>
+        </p:txBody>
+      </p:sp>
+      <p:sp>
+        <p:nvSpPr>
           <p:cNvPr id="25" name="Slide Number Placeholder 0"/>
           <p:cNvSpPr>
             <a:spLocks noGrp="1"/>
@@ -12609,6 +13796,133 @@
       </p:sp>
       <p:sp>
         <p:nvSpPr>
+          <p:cNvPr id="16" name="Shape 14"/>
+          <p:cNvSpPr/>
+          <p:nvPr/>
+        </p:nvSpPr>
+        <p:spPr>
+          <a:xfrm>
+            <a:off x="7526350" y="91440"/>
+            <a:ext cx="4116705" cy="274320"/>
+          </a:xfrm>
+          <a:prstGeom prst="rect">
+            <a:avLst/>
+          </a:prstGeom>
+          <a:solidFill>
+            <a:srgbClr val="E0F2FE"/>
+          </a:solidFill>
+          <a:ln w="12700">
+            <a:solidFill>
+              <a:srgbClr val="0369A1"/>
+            </a:solidFill>
+            <a:prstDash val="solid"/>
+          </a:ln>
+        </p:spPr>
+      </p:sp>
+      <p:sp>
+        <p:nvSpPr>
+          <p:cNvPr id="17" name="Shape 15"/>
+          <p:cNvSpPr/>
+          <p:nvPr/>
+        </p:nvSpPr>
+        <p:spPr>
+          <a:xfrm>
+            <a:off x="7526350" y="91440"/>
+            <a:ext cx="73152" cy="274320"/>
+          </a:xfrm>
+          <a:prstGeom prst="rect">
+            <a:avLst/>
+          </a:prstGeom>
+          <a:solidFill>
+            <a:srgbClr val="0369A1"/>
+          </a:solidFill>
+          <a:ln w="12700">
+            <a:solidFill>
+              <a:srgbClr val="0369A1"/>
+            </a:solidFill>
+            <a:prstDash val="solid"/>
+          </a:ln>
+        </p:spPr>
+      </p:sp>
+      <p:pic>
+        <p:nvPicPr>
+          <p:cNvPr id="18" name="Image 0" descr="preencoded.png">    </p:cNvPr>
+          <p:cNvPicPr>
+            <a:picLocks noChangeAspect="1"/>
+          </p:cNvPicPr>
+          <p:nvPr/>
+        </p:nvPicPr>
+        <p:blipFill>
+          <a:blip r:embed="rId1"/>
+          <a:stretch>
+            <a:fillRect/>
+          </a:stretch>
+        </p:blipFill>
+        <p:spPr>
+          <a:xfrm>
+            <a:off x="7654366" y="128016"/>
+            <a:ext cx="201168" cy="201168"/>
+          </a:xfrm>
+          <a:prstGeom prst="rect">
+            <a:avLst/>
+          </a:prstGeom>
+        </p:spPr>
+      </p:pic>
+      <p:sp>
+        <p:nvSpPr>
+          <p:cNvPr id="19" name="Text 16"/>
+          <p:cNvSpPr txBox="1"/>
+          <p:nvPr/>
+        </p:nvSpPr>
+        <p:spPr>
+          <a:xfrm>
+            <a:off x="7910398" y="91440"/>
+            <a:ext cx="3696081" cy="274320"/>
+          </a:xfrm>
+          <a:prstGeom prst="rect">
+            <a:avLst/>
+          </a:prstGeom>
+          <a:noFill/>
+          <a:ln/>
+        </p:spPr>
+        <p:txBody>
+          <a:bodyPr wrap="square" lIns="0" tIns="0" rIns="0" bIns="0" rtlCol="0" anchor="ctr"/>
+          <a:lstStyle/>
+          <a:p>
+            <a:pPr indent="0" marL="0">
+              <a:buNone/>
+            </a:pPr>
+            <a:r>
+              <a:rPr lang="en-US" sz="1100" b="1" dirty="0">
+                <a:solidFill>
+                  <a:srgbClr val="075985"/>
+                </a:solidFill>
+                <a:latin typeface="Calibri" pitchFamily="34" charset="0"/>
+                <a:ea typeface="Calibri" pitchFamily="34" charset="-122"/>
+                <a:cs typeface="Calibri" pitchFamily="34" charset="-120"/>
+              </a:rPr>
+              <a:t>DA COMPRENDERE OGGI</a:t>
+            </a:r>
+            <a:pPr indent="0" marL="0">
+              <a:buNone/>
+            </a:pPr>
+            <a:r>
+              <a:rPr lang="en-US" sz="1100" dirty="0">
+                <a:solidFill>
+                  <a:srgbClr val="075985"/>
+                </a:solidFill>
+                <a:latin typeface="Calibri" pitchFamily="34" charset="0"/>
+                <a:ea typeface="Calibri" pitchFamily="34" charset="-122"/>
+                <a:cs typeface="Calibri" pitchFamily="34" charset="-120"/>
+              </a:rPr>
+              <a:t> · impacchettare e pubblicare</a:t>
+            </a:r>
+            <a:endParaRPr lang="en-US" sz="1100" dirty="0"/>
+          </a:p>
+        </p:txBody>
+      </p:sp>
+      <p:sp>
+        <p:nvSpPr>
           <p:cNvPr id="25" name="Slide Number Placeholder 0"/>
           <p:cNvSpPr>
             <a:spLocks noGrp="1"/>
@@ -13401,6 +14715,133 @@
               <a:t>Correggetelo, portate la versione a 1.0.1, confezionate e inviate di nuovo: la 1.0.0 resta com'era</a:t>
             </a:r>
             <a:endParaRPr lang="en-US" sz="1900" dirty="0"/>
+          </a:p>
+        </p:txBody>
+      </p:sp>
+      <p:sp>
+        <p:nvSpPr>
+          <p:cNvPr id="22" name="Shape 20"/>
+          <p:cNvSpPr/>
+          <p:nvPr/>
+        </p:nvSpPr>
+        <p:spPr>
+          <a:xfrm>
+            <a:off x="7526350" y="91440"/>
+            <a:ext cx="4116705" cy="274320"/>
+          </a:xfrm>
+          <a:prstGeom prst="rect">
+            <a:avLst/>
+          </a:prstGeom>
+          <a:solidFill>
+            <a:srgbClr val="E0F2FE"/>
+          </a:solidFill>
+          <a:ln w="12700">
+            <a:solidFill>
+              <a:srgbClr val="0369A1"/>
+            </a:solidFill>
+            <a:prstDash val="solid"/>
+          </a:ln>
+        </p:spPr>
+      </p:sp>
+      <p:sp>
+        <p:nvSpPr>
+          <p:cNvPr id="23" name="Shape 21"/>
+          <p:cNvSpPr/>
+          <p:nvPr/>
+        </p:nvSpPr>
+        <p:spPr>
+          <a:xfrm>
+            <a:off x="7526350" y="91440"/>
+            <a:ext cx="73152" cy="274320"/>
+          </a:xfrm>
+          <a:prstGeom prst="rect">
+            <a:avLst/>
+          </a:prstGeom>
+          <a:solidFill>
+            <a:srgbClr val="0369A1"/>
+          </a:solidFill>
+          <a:ln w="12700">
+            <a:solidFill>
+              <a:srgbClr val="0369A1"/>
+            </a:solidFill>
+            <a:prstDash val="solid"/>
+          </a:ln>
+        </p:spPr>
+      </p:sp>
+      <p:pic>
+        <p:nvPicPr>
+          <p:cNvPr id="24" name="Image 0" descr="preencoded.png">    </p:cNvPr>
+          <p:cNvPicPr>
+            <a:picLocks noChangeAspect="1"/>
+          </p:cNvPicPr>
+          <p:nvPr/>
+        </p:nvPicPr>
+        <p:blipFill>
+          <a:blip r:embed="rId1"/>
+          <a:stretch>
+            <a:fillRect/>
+          </a:stretch>
+        </p:blipFill>
+        <p:spPr>
+          <a:xfrm>
+            <a:off x="7654366" y="128016"/>
+            <a:ext cx="201168" cy="201168"/>
+          </a:xfrm>
+          <a:prstGeom prst="rect">
+            <a:avLst/>
+          </a:prstGeom>
+        </p:spPr>
+      </p:pic>
+      <p:sp>
+        <p:nvSpPr>
+          <p:cNvPr id="25" name="Text 22"/>
+          <p:cNvSpPr txBox="1"/>
+          <p:nvPr/>
+        </p:nvSpPr>
+        <p:spPr>
+          <a:xfrm>
+            <a:off x="7910398" y="91440"/>
+            <a:ext cx="3696081" cy="274320"/>
+          </a:xfrm>
+          <a:prstGeom prst="rect">
+            <a:avLst/>
+          </a:prstGeom>
+          <a:noFill/>
+          <a:ln/>
+        </p:spPr>
+        <p:txBody>
+          <a:bodyPr wrap="square" lIns="0" tIns="0" rIns="0" bIns="0" rtlCol="0" anchor="ctr"/>
+          <a:lstStyle/>
+          <a:p>
+            <a:pPr indent="0" marL="0">
+              <a:buNone/>
+            </a:pPr>
+            <a:r>
+              <a:rPr lang="en-US" sz="1100" b="1" dirty="0">
+                <a:solidFill>
+                  <a:srgbClr val="075985"/>
+                </a:solidFill>
+                <a:latin typeface="Calibri" pitchFamily="34" charset="0"/>
+                <a:ea typeface="Calibri" pitchFamily="34" charset="-122"/>
+                <a:cs typeface="Calibri" pitchFamily="34" charset="-120"/>
+              </a:rPr>
+              <a:t>DA COMPRENDERE OGGI</a:t>
+            </a:r>
+            <a:pPr indent="0" marL="0">
+              <a:buNone/>
+            </a:pPr>
+            <a:r>
+              <a:rPr lang="en-US" sz="1100" dirty="0">
+                <a:solidFill>
+                  <a:srgbClr val="075985"/>
+                </a:solidFill>
+                <a:latin typeface="Calibri" pitchFamily="34" charset="0"/>
+                <a:ea typeface="Calibri" pitchFamily="34" charset="-122"/>
+                <a:cs typeface="Calibri" pitchFamily="34" charset="-120"/>
+              </a:rPr>
+              <a:t> · impacchettare e pubblicare</a:t>
+            </a:r>
+            <a:endParaRPr lang="en-US" sz="1100" dirty="0"/>
           </a:p>
         </p:txBody>
       </p:sp>

--- a/it/slides/23-Architettura_dei_Calcolatori-Verm1_sul_Cartridge_Store.pptx
+++ b/it/slides/23-Architettura_dei_Calcolatori-Verm1_sul_Cartridge_Store.pptx
@@ -119,7 +119,7 @@
   <p:extLst>
     <p:ext uri="{521415D9-36F7-43E2-AB2F-B90AF26B5E84}">
       <p14:sectionLst xmlns:p14="http://schemas.microsoft.com/office/powerpoint/2010/main">
-        <p14:section name="Apertura" id="{b5d716fd-f7d9-e429-68c4-69636a48a79a}">
+        <p14:section name="Apertura" id="{6ff91d8d-eb2f-65db-8674-e566e8ce08f7}">
           <p14:sldIdLst>
             <p14:sldId id="256"/>
             <p14:sldId id="257"/>
@@ -128,14 +128,14 @@
             <p14:sldId id="260"/>
           </p14:sldIdLst>
         </p14:section>
-        <p14:section name="Passo 2: un'identità" id="{92642b0d-26f6-821b-c88d-91b15a401f6e}">
+        <p14:section name="Passo 2: un'identità" id="{c64bcd52-859b-ecb7-7879-5bcf4d78b594}">
           <p14:sldIdLst>
             <p14:sldId id="261"/>
             <p14:sldId id="262"/>
             <p14:sldId id="263"/>
           </p14:sldIdLst>
         </p14:section>
-        <p14:section name="Passo 5: la pubblicazione" id="{570765a6-6678-bdbd-1fc9-e06050497f67}">
+        <p14:section name="Passo 5: la pubblicazione" id="{c403488e-bb92-ee6d-f57b-6211cc8a3c29}">
           <p14:sldIdLst>
             <p14:sldId id="264"/>
             <p14:sldId id="265"/>

--- a/it/slides/23-Architettura_dei_Calcolatori-Verm1_sul_Cartridge_Store.pptx
+++ b/it/slides/23-Architettura_dei_Calcolatori-Verm1_sul_Cartridge_Store.pptx
@@ -119,7 +119,7 @@
   <p:extLst>
     <p:ext uri="{521415D9-36F7-43E2-AB2F-B90AF26B5E84}">
       <p14:sectionLst xmlns:p14="http://schemas.microsoft.com/office/powerpoint/2010/main">
-        <p14:section name="Apertura" id="{6ff91d8d-eb2f-65db-8674-e566e8ce08f7}">
+        <p14:section name="Apertura" id="{165211bf-46e1-f604-6659-d33f0c1a9d6d}">
           <p14:sldIdLst>
             <p14:sldId id="256"/>
             <p14:sldId id="257"/>
@@ -128,14 +128,14 @@
             <p14:sldId id="260"/>
           </p14:sldIdLst>
         </p14:section>
-        <p14:section name="Passo 2: un'identità" id="{c64bcd52-859b-ecb7-7879-5bcf4d78b594}">
+        <p14:section name="Passo 2: un'identità" id="{d8a3d1c1-c005-a075-96a6-3e514e116825}">
           <p14:sldIdLst>
             <p14:sldId id="261"/>
             <p14:sldId id="262"/>
             <p14:sldId id="263"/>
           </p14:sldIdLst>
         </p14:section>
-        <p14:section name="Passo 5: la pubblicazione" id="{c403488e-bb92-ee6d-f57b-6211cc8a3c29}">
+        <p14:section name="Passo 5: la pubblicazione" id="{08362d8c-94a2-64c2-b35b-b3918d296bc4}">
           <p14:sldIdLst>
             <p14:sldId id="264"/>
             <p14:sldId id="265"/>
@@ -548,7 +548,7 @@
           <a:p>
             <a:r>
               <a:rPr lang="en-US" dirty="0"/>
-              <a:t>Il progetto finisce oggi, con il passo che trasforma un programma in un prodotto. Il vostro Verm1 gira sulla vostra scrivania; alla fine di questa lezione sarà un unico file che chiunque può installare, sul kit, su QEMU o su PRG32-QT, con un nome, un'icona e la vostra firma. La citazione, dal gruppo che costruì il primo Macintosh, dice che un lavoro è finito solo quando è stato consegnato.
+              <a:t>Il progetto si chiude oggi con il passo che trasforma un programma in un prodotto. Il Verm1 dello studente gira sulla sua scrivania; alla fine di questa lezione sarà un solo file che chiunque può installare, sul kit, su QEMU o su PRG32-QT, con un nome, un'icona e la firma del suo autore. La citazione, dal gruppo che costruì il primo Macintosh, sostiene che un'opera è finita solo quando è stata consegnata. La lezione tratta la consegna come una disciplina ingegneristica con i suoi concetti: identità, versioni, licenze e responsabilità.
 Stato di apprendimento: DA COMPRENDERE OGGI, alla fine di questa lezione lo spiegate, lo seguite passo passo e lo applicate da soli; DA UTILIZZARE OGGI, oggi seguite e usate la ricetta; come funziona dentro si spiega più avanti, o non fa parte del corso; DA COMPRENDERE PIÙ AVANTI, riconoscete il nome e lo scopo; lo spiega una lezione successiva. Una slide senza etichetta è contesto: una storia, un esempio, una domanda, un esercizio.
 Stato di apprendimento di questa lezione. DA COMPRENDERE OGGI: impacchettare e pubblicare; la cartuccia portabile. DA UTILIZZARE OGGI: gli strumenti di PRG32 (si usa, non si studia, in questo corso). DA COMPRENDERE PIÙ AVANTI: niente. Una slide senza etichetta è contesto: una storia, un esempio, una domanda, un esercizio.
 Per il docente: Ultima lezione del progetto; la Lezione 24 chiude il corso con uno sguardo in avanti. Ancora un tutorial: alla fine ogni studente ha un bundle, verm1-1.0.0.zip, controllato e pronto per l'invio. Il caricamento è un atto personale con un token personale: fatelo in laboratorio solo con gli studenti che lo desiderano. Tutto, fino al caricamento escluso, viene eseguito da tools/tests/verm1_store.py sul gioco di riferimento.</a:t>
@@ -639,7 +639,7 @@
           <a:p>
             <a:r>
               <a:rPr lang="en-US" dirty="0"/>
-              <a:t>La lista di controllo per l'invio, sette punti: giocato fino alla fine su ogni architettura; abi-table per ogni file; id unico e vostro, versione nuova, descrizioni oneste; autori, licenza e colophon completi; i metadati giusti dentro ogni cartuccia; il bundle provato su un altro calcolatore; il token in nessun file. Una lista di controllo non è burocrazia: è lo strumento con cui gli esperti evitano gli errori degli esperti.
+              <a:t>La lista di controllo della proposta, sette punti: giocato fino alla fine su ogni architettura; abi-table presente in ogni file; identificatore unico e dell'autore, versione nuova, descrizioni oneste; autori, licenza e colophon completi; i metadati corretti dentro ogni cartuccia; il bundle provato su un altro computer; il token in nessun file. Una lista di controllo non è burocrazia: è lo strumento con cui gli esperti evitano gli errori che gli esperti commettono, una pratica presa in prestito dall'aviazione e dalla chirurgia.
 DA COMPRENDERE OGGI: impacchettare e pubblicare.
 Per il docente: Stampatela. Una lista di controllo non è burocrazia: è il modo in cui piloti e chirurghi evitano gli errori che commettono gli esperti.</a:t>
             </a:r>
@@ -729,8 +729,8 @@
           <a:p>
             <a:r>
               <a:rPr lang="en-US" dirty="0"/>
-              <a:t>Ricordate la regola sulle versioni: ciò che è stato pubblicato si considera permanente.
-Pensate a dove finiscono i metadati: dentro un file di cartuccia. Quante architetture ha un file di cartuccia?
+              <a:t>Per la prima domanda vale la regola sulle versioni: ciò che è stato pubblicato si considera permanente.
+Per la seconda si considera dove finiscono i metadati, dentro un solo file di cartuccia, e quante architetture serve un solo file di cartuccia.
 Per il docente: 1. Risposta: B. Una versione pubblicata si considera permanente: una correzione è una nuova versione con lo stesso id.
 2. Risposta: B. L'elenco dei file appartiene al bundle; una singola cartuccia dichiara la propria architettura, data sulla riga di comando.</a:t>
             </a:r>
@@ -820,7 +820,7 @@
           <a:p>
             <a:r>
               <a:rPr lang="en-US" dirty="0"/>
-              <a:t>Un token è una credenziale, come una password. Quale dei quattro posti non è un file che viene condiviso?
+              <a:t>Un token è una credenziale, paragonabile a una password. La domanda è quale dei quattro luoghi non sia un file che viene mai condiviso.
 Per il docente: Risposta: C. Un token è una credenziale: non va mai in un file condiviso o sotto controllo di versione.</a:t>
             </a:r>
             <a:endParaRPr lang="en-US" dirty="0"/>
@@ -909,7 +909,7 @@
           <a:p>
             <a:r>
               <a:rPr lang="en-US" dirty="0"/>
-              <a:t>Che cosa avete costruito in questo corso. Un gioco di seicento righe di assembly, cresciuto da tre funzioni che si limitavano a ritornare. Con esso, ogni livello della macchina: bit e numeri, porte e tabelle, stato e memoria, il processore, lo schermo, i dispositivi. Un metodo: un passo eseguibile alla volta, e uno sguardo dentro ogni volta che qualcosa vi sorprende. E l'ultimo passo, che ne fa ingegneria: un prodotto con un nome, una versione e un autore. La prossima lezione guarda oltre il kit.
+              <a:t>Ciò che lo studente ha costruito in questo corso. Un gioco di circa seicento righe di assembly, cresciuto da tre funzioni che si limitavano a ritornare, e con esso una conoscenza operativa di ogni livello della macchina: bit e numeri, porte e tabelle, stato e memoria, il processore, il display e i dispositivi. Un metodo: un passo eseguibile alla volta, e un'ispezione della macchina ogni volta che qualcosa sorprende. E il passo finale che rende il lavoro ingegneria: un prodotto con un nome, una versione e un autore. La prossima lezione guarda oltre il kit.
 Stato di apprendimento, riepilogo. DA COMPRENDERE OGGI: impacchettare e pubblicare; la cartuccia portabile. DA UTILIZZARE OGGI: gli strumenti di PRG32 (si usa, non si studia, in questo corso). DA COMPRENDERE PIÙ AVANTI: niente. Una slide senza etichetta è contesto: una storia, un esempio, una domanda, un esercizio.
 Per il docente: Il progetto finisce qui; la Lezione 24 guarda oltre il kit, alle macchine che eseguono le stesse istruzioni su grande scala. I prodotti del progetto sono il sorgente della variante dello studente e il suo bundle; l'esame orale può partire da una qualunque delle sue righe.</a:t>
             </a:r>
@@ -999,7 +999,7 @@
           <a:p>
             <a:r>
               <a:rPr lang="en-US" dirty="0"/>
-              <a:t>Cinque risultati. Il vostro gioco compilato per due architetture dallo stesso sorgente. Un manifest che gli dà un'identità: id, titolo, versione, autori, licenza. Un'icona e un colophon con crediti e comandi. Un bundle, un solo file ZIP, controllato e pronto per il Cartridge Store. E un'idea chiara di che cosa succede dopo la pubblicazione, e di che cosa rispondete.</a:t>
+              <a:t>Cinque risultati. Il gioco compilato per due architetture da un solo sorgente. Un manifesto che gli dà un'identità: identificatore, titolo, versione, autori e licenza. Un'icona e un colophon con crediti e comandi. Un bundle, un solo file ZIP, verificato e pronto per il Cartridge Store. E una chiara comprensione di ciò che segue la pubblicazione, e di ciò di cui l'autore risponde.</a:t>
             </a:r>
             <a:endParaRPr lang="en-US" dirty="0"/>
           </a:p>
@@ -1087,7 +1087,7 @@
           <a:p>
             <a:r>
               <a:rPr lang="en-US" dirty="0"/>
-              <a:t>Perché pubblicare? Un programma che gira solo sul calcolatore del suo autore è un esercizio; uno che altri possono installare è un prodotto. Pubblicare vi obbliga a rispondere a domande che un esercizio lascia saltare: come si chiama, chi l'ha fatto, su che cosa gira, che cosa possono farne gli altri. Il Cartridge Store è lo scaffale di PRG32, e ogni cartuccia che vi si trova è stata scritta da qualcuno che ha cominciato da dove avete cominciato voi.
+              <a:t>Perché pubblicare? Un programma che gira solo sul computer del suo autore è un esercizio; uno che altri possono installare è un prodotto. La pubblicazione impone risposte a domande che un esercizio permette di eludere: come si chiama il programma, chi lo ha fatto, su che cosa gira, e che cosa possono farne gli altri. Il Cartridge Store è lo scaffale di PRG32, e ogni cartuccia su di esso è stata scritta da qualcuno che ha cominciato da dove ha cominciato lo studente.
 DA COMPRENDERE OGGI: impacchettare e pubblicare.
 Per il docente: Lo Store è su store.prg32.uniparthenope.it; il suo software è aperto, github.com/riscv-prg32/CartridgeStore. PRG32-QT ha un proprio browser dello Store. Mostrate entrambi.</a:t>
             </a:r>
@@ -1177,7 +1177,7 @@
           <a:p>
             <a:r>
               <a:rPr lang="en-US" dirty="0"/>
-              <a:t>Il percorso dal sorgente allo scaffale in sei tappe: il vostro file sorgente; due cartucce, una per architettura; i metadati, cioè identità, icona e crediti; il bundle; la revisione di un redattore; lo Store. I primi quattro passi di oggi avvengono interamente sul vostro calcolatore. Solo il quinto parla con lo Store: fino ad allora nulla lascia la vostra macchina.
+              <a:t>Il percorso dal sorgente allo scaffale in sei fasi: il file sorgente; due cartucce, una per architettura; i metadati, che comprendono identità, icona e crediti; il bundle; la revisione da parte di un editore; e lo Store. I primi quattro passi di oggi avvengono interamente sul computer dello studente. Solo il quinto comunica con lo Store, così che fino ad allora nulla lasci la macchina.
 DA COMPRENDERE OGGI: impacchettare e pubblicare.
 Per il docente: Il percorso della lezione. Nulla lascia il calcolatore dello studente prima del comando di pubblicazione.</a:t>
             </a:r>
@@ -1267,7 +1267,7 @@
           <a:p>
             <a:r>
               <a:rPr lang="en-US" dirty="0"/>
-              <a:t>Prima di confezionare, chiedetevi se il gioco è finito. Sei controlli, ciascuno con un metodo e uno strumento. Parte, si gioca e finisce: giocate tre partite intere. Nessun frame è in ritardo: guardate la telemetria. La memoria è coerente: mettete in pausa a caso e confrontate anello, mappa e schermo. Gira sulla seconda architettura, QEMU, e sul kit vero se ne avete uno. Ed è vostro: ha qualcosa che il riferimento non ha. Una cartuccia mai eseguita su un target non va pubblicata per quel target.
+              <a:t>Prima di impacchettare va stabilito se il gioco è finito. Sei verifiche, ciascuna con un metodo e uno strumento. Si avvia, si gioca e finisce: si giocano tre partite complete. Nessun frame è in ritardo: si osserva la telemetria. La memoria è coerente: si mette in pausa a caso e si confrontano anello, mappa e schermo, l'invariante della Parte 3. Gira sulla seconda architettura, QEMU, e sul kit fisico se è disponibile. Ed è davvero dell'autore: contiene qualcosa che il riferimento non ha. Una cartuccia mai eseguita su un target non va pubblicata per quel target.
 DA COMPRENDERE OGGI: impacchettare e pubblicare.
 Per il docente: Il debugger si usa un'ultima volta, come strumento di qualità. Una cartuccia che non è mai stata eseguita su un target non va pubblicata per quel target.</a:t>
             </a:r>
@@ -1357,7 +1357,7 @@
           <a:p>
             <a:r>
               <a:rPr lang="en-US" dirty="0"/>
-              <a:t>Ogni campo vi impegna a qualcosa. L'id è per consuetudine un nome di dominio rovesciato, e non cambia mai: metteteci il vostro nome, perché due studenti non possono pubblicare lo stesso. La version segue lo schema major, minor, patch, e una versione pubblicata si considera permanente: un errore si corregge con una nuova versione. Gli authors sono tutti quelli che hanno scritto il gioco. La license dice che cosa possono farne gli altri. I tags sono il modo in cui verrà trovato.
+              <a:t>Ogni campo del manifesto è un impegno. L'id è per convenzione un nome di dominio rovesciato e non cambia mai; deve contenere il nome dell'autore, perché due studenti non possono pubblicare lo stesso identificatore. La version segue lo schema maggiore, minore, correzione, e una versione pubblicata si considera immutabile: un errore si corregge con una nuova versione. Gli authors sono tutti coloro che hanno scritto il gioco. La license dice che cosa possono farne gli altri. I tags determinano come verrà trovato.
 DA COMPRENDERE OGGI: impacchettare e pubblicare.
 Per il docente: Due studenti non possono pubblicare lo stesso id: ciascuno usa un id proprio, per esempio it.uniparthenope.arc12.&lt;cognome&gt;.verm1. Concordate la convenzione in aula. Un id e una versione, una volta pubblicati, vanno considerati permanenti: un errore si corregge con una nuova versione, non con una sostituzione. È una regola di buona pratica (semantic versioning), su cui contano i giocatori che hanno già installato la 1.0.0.</a:t>
             </a:r>
@@ -1447,7 +1447,7 @@
           <a:p>
             <a:r>
               <a:rPr lang="en-US" dirty="0"/>
-              <a:t>L'icona è una piccola immagine PNG che rappresenta il gioco sullo scaffale. Quella di riferimento è di 64 per 64 pixel: un verme e un pezzo di cibo con i colori del gioco. La pixel art si addice a una macchina di questa risoluzione: disegnate in grande, cella per cella, con qualunque editor che salvi PNG. Salvatela come icon.png accanto al manifest. E disegnatela voi: un'immagine presa dal web è il lavoro di qualcun altro.
+              <a:t>L'icona è una piccola immagine PNG che rappresenta il gioco sullo scaffale. L'icona di riferimento è di 64 per 64 pixel: un verme e un boccone di cibo nei colori del gioco. La pixel art si addice a una macchina di questa risoluzione; conviene disegnarla in grande, cella per cella, con qualsiasi editor che salvi in PNG, e salvarla come icon.png accanto al manifesto. Va disegnata dall'autore: un'immagine presa dal web è opera di qualcun altro.
 DA COMPRENDERE OGGI: impacchettare e pubblicare.
 Per il docente: L'icona di riferimento è verm1/store/icon.png. Un'icona presa dal web è il lavoro di qualcun altro: disegnate la vostra.</a:t>
             </a:r>
@@ -1537,7 +1537,7 @@
           <a:p>
             <a:r>
               <a:rPr lang="en-US" dirty="0"/>
-              <a:t>Un omaggio non è una copia. Verm1 è un omaggio a Snake: l'idea di un verme che cresce è vecchia quanto Blockade, del 1976, e appartiene a tutti. Il nome, il codice, l'icona e i suoni sono nostri. Le regole di un gioco non sono protette; codice, immagini, musica e nomi sì. Quindi, prima di pubblicare, chiedetevi di ogni pezzo: l'ho fatto io? Se no, la sua licenza mi permette di pubblicarlo, e ho citato l'autore? Sopra c'è il vostro nome: pubblicate solo ciò che firmereste.
+              <a:t>Un omaggio non è una copia. Verm1 è un omaggio a Snake: l'idea di un verme che cresce è antica quanto Blockade, del 1976, e appartiene a tutti, mentre il nome, il codice, l'icona e i suoni sono originali. Le regole di un gioco non sono protette; codice, immagini, musica e nomi lo sono. Prima della pubblicazione ogni componente va quindi esaminata: l'ha fatta l'autore? Se no, la sua licenza ne permette la pubblicazione, e sono stati dati i crediti? Il nome dell'autore compare sull'opera, quindi va pubblicato solo ciò che l'autore firmerebbe.
 DA COMPRENDERE OGGI: impacchettare e pubblicare.
 Per il docente: Le regole di un gioco non sono protette; codice, immagini, musica e nomi sì. Un'introduzione breve e concreta al diritto d'autore, che gli ingegneri incontrano presto.</a:t>
             </a:r>
@@ -1627,7 +1627,7 @@
           <a:p>
             <a:r>
               <a:rPr lang="en-US" dirty="0"/>
-              <a:t>Che cosa succede dopo, in quattro tappe. In attesa: il bundle è conservato come invio, e non è ancora sullo scaffale. Revisione: un redattore controlla che si installi, giri, sia descritto onestamente e non contenga nulla che non sia vostro. Pubblicato: il gioco compare nello Store per le architetture dichiarate. E se trovate un errore: correggetelo, portate la versione a 1.0.1, confezionate e inviate di nuovo; la versione 1.0.0 resta com'era.
+              <a:t>Ciò che segue, in quattro fasi. In attesa: il bundle è conservato come proposta e non è ancora sullo scaffale. Revisione: un editore verifica che si installi, giri, sia descritto onestamente e non contenga nulla che non sia dell'autore. Pubblicato: il gioco compare nello Store per le architetture dichiarate. E se si trova un errore, lo si corregge, si porta la versione a 1.0.1, e il bundle si impacchetta e si propone di nuovo, mentre la versione 1.0.0 resta com'era.
 DA COMPRENDERE OGGI: impacchettare e pubblicare.
 Per il docente: La moderazione protegge i giocatori e gli autori. Un rifiuto arriva con una motivazione: rispondete con una nuova versione.</a:t>
             </a:r>
@@ -2746,7 +2746,7 @@
                 <a:ea typeface="Calibri" pitchFamily="34" charset="-122"/>
                 <a:cs typeface="Calibri" pitchFamily="34" charset="-120"/>
               </a:rPr>
-              <a:t>23-Architettura_dei_Calcolatori-Verm1_sul_Cartridge_Store-Codice.pptx</a:t>
+              <a:t>23-Architettura_dei_Calcolatori-Verm1_sul_Cartridge_Store-Lab.pptx</a:t>
             </a:r>
             <a:endParaRPr lang="en-US" sz="1300" dirty="0"/>
           </a:p>

--- a/it/slides/23-Architettura_dei_Calcolatori-Verm1_sul_Cartridge_Store.pptx
+++ b/it/slides/23-Architettura_dei_Calcolatori-Verm1_sul_Cartridge_Store.pptx
@@ -119,7 +119,7 @@
   <p:extLst>
     <p:ext uri="{521415D9-36F7-43E2-AB2F-B90AF26B5E84}">
       <p14:sectionLst xmlns:p14="http://schemas.microsoft.com/office/powerpoint/2010/main">
-        <p14:section name="Apertura" id="{165211bf-46e1-f604-6659-d33f0c1a9d6d}">
+        <p14:section name="Apertura" id="{4de85e1f-9b78-1a68-30e2-9e8e09b21e51}">
           <p14:sldIdLst>
             <p14:sldId id="256"/>
             <p14:sldId id="257"/>
@@ -128,14 +128,14 @@
             <p14:sldId id="260"/>
           </p14:sldIdLst>
         </p14:section>
-        <p14:section name="Passo 2: un'identità" id="{d8a3d1c1-c005-a075-96a6-3e514e116825}">
+        <p14:section name="Passo 2: un'identità" id="{a7fbc4e4-18b6-95c3-5094-6d49a1e17c41}">
           <p14:sldIdLst>
             <p14:sldId id="261"/>
             <p14:sldId id="262"/>
             <p14:sldId id="263"/>
           </p14:sldIdLst>
         </p14:section>
-        <p14:section name="Passo 5: la pubblicazione" id="{08362d8c-94a2-64c2-b35b-b3918d296bc4}">
+        <p14:section name="Passo 5: la pubblicazione" id="{de7ff10e-3603-84e2-bc1a-0101bdecb3f9}">
           <p14:sldIdLst>
             <p14:sldId id="264"/>
             <p14:sldId id="265"/>

--- a/it/slides/23-Architettura_dei_Calcolatori-Verm1_sul_Cartridge_Store.pptx
+++ b/it/slides/23-Architettura_dei_Calcolatori-Verm1_sul_Cartridge_Store.pptx
@@ -119,7 +119,7 @@
   <p:extLst>
     <p:ext uri="{521415D9-36F7-43E2-AB2F-B90AF26B5E84}">
       <p14:sectionLst xmlns:p14="http://schemas.microsoft.com/office/powerpoint/2010/main">
-        <p14:section name="Apertura" id="{4de85e1f-9b78-1a68-30e2-9e8e09b21e51}">
+        <p14:section name="Apertura" id="{225faa9d-804d-5fd4-4740-ba9b52a8551d}">
           <p14:sldIdLst>
             <p14:sldId id="256"/>
             <p14:sldId id="257"/>
@@ -128,14 +128,14 @@
             <p14:sldId id="260"/>
           </p14:sldIdLst>
         </p14:section>
-        <p14:section name="Passo 2: un'identità" id="{a7fbc4e4-18b6-95c3-5094-6d49a1e17c41}">
+        <p14:section name="Passo 2: un'identità" id="{073fafdf-317c-5ac1-c439-3e5784cbf9df}">
           <p14:sldIdLst>
             <p14:sldId id="261"/>
             <p14:sldId id="262"/>
             <p14:sldId id="263"/>
           </p14:sldIdLst>
         </p14:section>
-        <p14:section name="Passo 5: la pubblicazione" id="{de7ff10e-3603-84e2-bc1a-0101bdecb3f9}">
+        <p14:section name="Passo 5: la pubblicazione" id="{9baf8900-e7eb-21f7-15bb-ac17539fb53a}">
           <p14:sldIdLst>
             <p14:sldId id="264"/>
             <p14:sldId id="265"/>
@@ -551,6 +551,7 @@
               <a:t>Il progetto si chiude oggi con il passo che trasforma un programma in un prodotto. Il Verm1 dello studente gira sulla sua scrivania; alla fine di questa lezione sarà un solo file che chiunque può installare, sul kit, su QEMU o su PRG32-QT, con un nome, un'icona e la firma del suo autore. La citazione, dal gruppo che costruì il primo Macintosh, sostiene che un'opera è finita solo quando è stata consegnata. La lezione tratta la consegna come una disciplina ingegneristica con i suoi concetti: identità, versioni, licenze e responsabilità.
 Stato di apprendimento: DA COMPRENDERE OGGI, alla fine di questa lezione lo spiegate, lo seguite passo passo e lo applicate da soli; DA UTILIZZARE OGGI, oggi seguite e usate la ricetta; come funziona dentro si spiega più avanti, o non fa parte del corso; DA COMPRENDERE PIÙ AVANTI, riconoscete il nome e lo scopo; lo spiega una lezione successiva. Una slide senza etichetta è contesto: una storia, un esempio, una domanda, un esercizio.
 Stato di apprendimento di questa lezione. DA COMPRENDERE OGGI: impacchettare e pubblicare; la cartuccia portabile. DA UTILIZZARE OGGI: gli strumenti di PRG32 (si usa, non si studia, in questo corso). DA COMPRENDERE PIÙ AVANTI: niente. Una slide senza etichetta è contesto: una storia, un esempio, una domanda, un esercizio.
+Percorso. I risultati di oggi: (1) compilare cartucce portabili e verificarle; (2) impacchettare un bundle con i metadati e pubblicarlo in sicurezza. Si appoggia su: solo ciò che ha preparato la Lezione 01. Prossimo passo: Lezione 24, Oltre un solo core: RISC-V superscalare, HPC, GPU e FPGA.
 Per il docente: Ultima lezione del progetto; la Lezione 24 chiude il corso con uno sguardo in avanti. Ancora un tutorial: alla fine ogni studente ha un bundle, verm1-1.0.0.zip, controllato e pronto per l'invio. Il caricamento è un atto personale con un token personale: fatelo in laboratorio solo con gli studenti che lo desiderano. Tutto, fino al caricamento escluso, viene eseguito da tools/tests/verm1_store.py sul gioco di riferimento.</a:t>
             </a:r>
             <a:endParaRPr lang="en-US" dirty="0"/>
@@ -910,7 +911,7 @@
             <a:r>
               <a:rPr lang="en-US" dirty="0"/>
               <a:t>Ciò che lo studente ha costruito in questo corso. Un gioco di circa seicento righe di assembly, cresciuto da tre funzioni che si limitavano a ritornare, e con esso una conoscenza operativa di ogni livello della macchina: bit e numeri, porte e tabelle, stato e memoria, il processore, il display e i dispositivi. Un metodo: un passo eseguibile alla volta, e un'ispezione della macchina ogni volta che qualcosa sorprende. E il passo finale che rende il lavoro ingegneria: un prodotto con un nome, una versione e un autore. La prossima lezione guarda oltre il kit.
-Stato di apprendimento, riepilogo. DA COMPRENDERE OGGI: impacchettare e pubblicare; la cartuccia portabile. DA UTILIZZARE OGGI: gli strumenti di PRG32 (si usa, non si studia, in questo corso). DA COMPRENDERE PIÙ AVANTI: niente. Una slide senza etichetta è contesto: una storia, un esempio, una domanda, un esercizio.
+Stato di apprendimento, riepilogo. DA COMPRENDERE OGGI: impacchettare e pubblicare; la cartuccia portabile. DA UTILIZZARE OGGI: gli strumenti di PRG32 (si usa, non si studia, in questo corso). DA COMPRENDERE PIÙ AVANTI: niente. Una slide senza etichetta è contesto: una storia, un esempio, una domanda, un esercizio. Il filo della lezione: Un gioco è finito quando qualcun altro può eseguirlo: una cartuccia portabile, metadati onesti, un bundle provato su un altro computer e un token tenuto segreto. Prossimo passo: macchine più veloci di un solo core. Biglietto d'uscita (da due a quattro minuti, da soli, su carta): 1. cartridge summary stampa import_model: abi-table. Che cosa dice questo della cartuccia, e perché lo Store accetta solo cartucce del genere? 2. Avete pubblicato la versione 1.0.0 e trovato un errore. Che cosa pubblicate ora? Dove non deve mai comparire il token dello Store?
 Per il docente: Il progetto finisce qui; la Lezione 24 guarda oltre il kit, alle macchine che eseguono le stesse istruzioni su grande scala. I prodotti del progetto sono il sorgente della variante dello studente e il suo bundle; l'esame orale può partire da una qualunque delle sue righe.</a:t>
             </a:r>
             <a:endParaRPr lang="en-US" dirty="0"/>
